--- a/proposals/2026-10_kcg-aiops-relay/발표자료.pptx
+++ b/proposals/2026-10_kcg-aiops-relay/발표자료.pptx
@@ -4512,7 +4512,7 @@
           <a:noFill/>
         </p:spPr>
         <p:txBody>
-          <a:bodyPr wrap="square" anchor="t" lIns="43200" rIns="43200" tIns="43200" bIns="43200">
+          <a:bodyPr wrap="square" anchor="ctr" lIns="43200" rIns="43200" tIns="43200" bIns="43200">
             <a:noAutofit/>
           </a:bodyPr>
           <a:lstStyle/>
@@ -4522,7 +4522,7 @@
                 <a:spcPct val="120000"/>
               </a:lnSpc>
               <a:spcBef>
-                <a:spcPts val="1700"/>
+                <a:spcPts val="2700"/>
               </a:spcBef>
               <a:spcAft>
                 <a:spcPts val="0"/>
@@ -4531,7 +4531,7 @@
               <a:buChar char="•"/>
             </a:pPr>
             <a:r>
-              <a:rPr sz="1437" b="0">
+              <a:rPr sz="1450" b="0">
                 <a:solidFill>
                   <a:srgbClr val="1F2A44"/>
                 </a:solidFill>
@@ -4548,7 +4548,7 @@
                 <a:spcPct val="120000"/>
               </a:lnSpc>
               <a:spcBef>
-                <a:spcPts val="1700"/>
+                <a:spcPts val="2700"/>
               </a:spcBef>
               <a:spcAft>
                 <a:spcPts val="0"/>
@@ -4557,7 +4557,7 @@
               <a:buChar char="•"/>
             </a:pPr>
             <a:r>
-              <a:rPr sz="1437" b="0">
+              <a:rPr sz="1450" b="0">
                 <a:solidFill>
                   <a:srgbClr val="1F2A44"/>
                 </a:solidFill>
@@ -4752,7 +4752,7 @@
           <a:lstStyle/>
           <a:p>
             <a:r>
-              <a:rPr sz="1450" b="1">
+              <a:rPr sz="1550" b="1">
                 <a:solidFill>
                   <a:srgbClr val="1F5FD1"/>
                 </a:solidFill>
@@ -4826,7 +4826,7 @@
           <a:noFill/>
         </p:spPr>
         <p:txBody>
-          <a:bodyPr wrap="square" anchor="t" lIns="28800" rIns="28800" tIns="28800" bIns="28800">
+          <a:bodyPr wrap="square" anchor="ctr" lIns="28800" rIns="28800" tIns="28800" bIns="28800">
             <a:noAutofit/>
           </a:bodyPr>
           <a:lstStyle/>
@@ -4839,13 +4839,13 @@
                 <a:spcPts val="0"/>
               </a:spcBef>
               <a:spcAft>
-                <a:spcPts val="1000"/>
+                <a:spcPts val="1800"/>
               </a:spcAft>
               <a:buFont typeface="Segoe UI Symbol"/>
               <a:buChar char="✓"/>
             </a:pPr>
             <a:r>
-              <a:rPr sz="1350" b="0">
+              <a:rPr sz="1450" b="0">
                 <a:solidFill>
                   <a:srgbClr val="1F2A44"/>
                 </a:solidFill>
@@ -4865,13 +4865,13 @@
                 <a:spcPts val="0"/>
               </a:spcBef>
               <a:spcAft>
-                <a:spcPts val="1000"/>
+                <a:spcPts val="1800"/>
               </a:spcAft>
               <a:buFont typeface="Segoe UI Symbol"/>
               <a:buChar char="✓"/>
             </a:pPr>
             <a:r>
-              <a:rPr sz="1350" b="0">
+              <a:rPr sz="1450" b="0">
                 <a:solidFill>
                   <a:srgbClr val="1F2A44"/>
                 </a:solidFill>
@@ -4891,13 +4891,13 @@
                 <a:spcPts val="0"/>
               </a:spcBef>
               <a:spcAft>
-                <a:spcPts val="1000"/>
+                <a:spcPts val="1800"/>
               </a:spcAft>
               <a:buFont typeface="Segoe UI Symbol"/>
               <a:buChar char="✓"/>
             </a:pPr>
             <a:r>
-              <a:rPr sz="1350" b="0">
+              <a:rPr sz="1450" b="0">
                 <a:solidFill>
                   <a:srgbClr val="1F2A44"/>
                 </a:solidFill>
@@ -4981,7 +4981,7 @@
           <a:lstStyle/>
           <a:p>
             <a:r>
-              <a:rPr sz="1450" b="1">
+              <a:rPr sz="1550" b="1">
                 <a:solidFill>
                   <a:srgbClr val="1F5FD1"/>
                 </a:solidFill>
@@ -5055,7 +5055,7 @@
           <a:noFill/>
         </p:spPr>
         <p:txBody>
-          <a:bodyPr wrap="square" anchor="t" lIns="28800" rIns="28800" tIns="28800" bIns="28800">
+          <a:bodyPr wrap="square" anchor="ctr" lIns="28800" rIns="28800" tIns="28800" bIns="28800">
             <a:noAutofit/>
           </a:bodyPr>
           <a:lstStyle/>
@@ -5068,13 +5068,13 @@
                 <a:spcPts val="0"/>
               </a:spcBef>
               <a:spcAft>
-                <a:spcPts val="1000"/>
+                <a:spcPts val="1800"/>
               </a:spcAft>
               <a:buFont typeface="Segoe UI Symbol"/>
               <a:buChar char="✓"/>
             </a:pPr>
             <a:r>
-              <a:rPr sz="1350" b="0">
+              <a:rPr sz="1450" b="0">
                 <a:solidFill>
                   <a:srgbClr val="1F2A44"/>
                 </a:solidFill>
@@ -5094,13 +5094,13 @@
                 <a:spcPts val="0"/>
               </a:spcBef>
               <a:spcAft>
-                <a:spcPts val="1000"/>
+                <a:spcPts val="1800"/>
               </a:spcAft>
               <a:buFont typeface="Segoe UI Symbol"/>
               <a:buChar char="✓"/>
             </a:pPr>
             <a:r>
-              <a:rPr sz="1350" b="0">
+              <a:rPr sz="1450" b="0">
                 <a:solidFill>
                   <a:srgbClr val="1F2A44"/>
                 </a:solidFill>
@@ -5120,13 +5120,13 @@
                 <a:spcPts val="0"/>
               </a:spcBef>
               <a:spcAft>
-                <a:spcPts val="1000"/>
+                <a:spcPts val="1800"/>
               </a:spcAft>
               <a:buFont typeface="Segoe UI Symbol"/>
               <a:buChar char="✓"/>
             </a:pPr>
             <a:r>
-              <a:rPr sz="1350" b="0">
+              <a:rPr sz="1450" b="0">
                 <a:solidFill>
                   <a:srgbClr val="1F2A44"/>
                 </a:solidFill>
@@ -5210,7 +5210,7 @@
           <a:lstStyle/>
           <a:p>
             <a:r>
-              <a:rPr sz="1450" b="1">
+              <a:rPr sz="1550" b="1">
                 <a:solidFill>
                   <a:srgbClr val="1F5FD1"/>
                 </a:solidFill>
@@ -5284,7 +5284,7 @@
           <a:noFill/>
         </p:spPr>
         <p:txBody>
-          <a:bodyPr wrap="square" anchor="t" lIns="28800" rIns="28800" tIns="28800" bIns="28800">
+          <a:bodyPr wrap="square" anchor="ctr" lIns="28800" rIns="28800" tIns="28800" bIns="28800">
             <a:noAutofit/>
           </a:bodyPr>
           <a:lstStyle/>
@@ -5297,13 +5297,13 @@
                 <a:spcPts val="0"/>
               </a:spcBef>
               <a:spcAft>
-                <a:spcPts val="1000"/>
+                <a:spcPts val="1800"/>
               </a:spcAft>
               <a:buFont typeface="Segoe UI Symbol"/>
               <a:buChar char="✓"/>
             </a:pPr>
             <a:r>
-              <a:rPr sz="1350" b="0">
+              <a:rPr sz="1450" b="0">
                 <a:solidFill>
                   <a:srgbClr val="1F2A44"/>
                 </a:solidFill>
@@ -5323,13 +5323,13 @@
                 <a:spcPts val="0"/>
               </a:spcBef>
               <a:spcAft>
-                <a:spcPts val="1000"/>
+                <a:spcPts val="1800"/>
               </a:spcAft>
               <a:buFont typeface="Segoe UI Symbol"/>
               <a:buChar char="✓"/>
             </a:pPr>
             <a:r>
-              <a:rPr sz="1350" b="0">
+              <a:rPr sz="1450" b="0">
                 <a:solidFill>
                   <a:srgbClr val="1F2A44"/>
                 </a:solidFill>
@@ -5349,13 +5349,13 @@
                 <a:spcPts val="0"/>
               </a:spcBef>
               <a:spcAft>
-                <a:spcPts val="1000"/>
+                <a:spcPts val="1800"/>
               </a:spcAft>
               <a:buFont typeface="Segoe UI Symbol"/>
               <a:buChar char="✓"/>
             </a:pPr>
             <a:r>
-              <a:rPr sz="1350" b="0">
+              <a:rPr sz="1450" b="0">
                 <a:solidFill>
                   <a:srgbClr val="1F2A44"/>
                 </a:solidFill>
@@ -5985,7 +5985,7 @@
           <a:lstStyle/>
           <a:p>
             <a:r>
-              <a:rPr sz="1517" b="1">
+              <a:rPr sz="1550" b="1">
                 <a:solidFill>
                   <a:srgbClr val="1F5FD1"/>
                 </a:solidFill>
@@ -6059,7 +6059,7 @@
           <a:noFill/>
         </p:spPr>
         <p:txBody>
-          <a:bodyPr wrap="square" anchor="t" lIns="28800" rIns="28800" tIns="28800" bIns="28800">
+          <a:bodyPr wrap="square" anchor="ctr" lIns="28800" rIns="28800" tIns="28800" bIns="28800">
             <a:noAutofit/>
           </a:bodyPr>
           <a:lstStyle/>
@@ -6072,13 +6072,13 @@
                 <a:spcPts val="0"/>
               </a:spcBef>
               <a:spcAft>
-                <a:spcPts val="1000"/>
+                <a:spcPts val="1800"/>
               </a:spcAft>
               <a:buFont typeface="Segoe UI Symbol"/>
               <a:buChar char="✓"/>
             </a:pPr>
             <a:r>
-              <a:rPr sz="1417" b="0">
+              <a:rPr sz="1450" b="0">
                 <a:solidFill>
                   <a:srgbClr val="1F2A44"/>
                 </a:solidFill>
@@ -6098,13 +6098,13 @@
                 <a:spcPts val="0"/>
               </a:spcBef>
               <a:spcAft>
-                <a:spcPts val="1000"/>
+                <a:spcPts val="1800"/>
               </a:spcAft>
               <a:buFont typeface="Segoe UI Symbol"/>
               <a:buChar char="✓"/>
             </a:pPr>
             <a:r>
-              <a:rPr sz="1417" b="0">
+              <a:rPr sz="1450" b="0">
                 <a:solidFill>
                   <a:srgbClr val="1F2A44"/>
                 </a:solidFill>
@@ -6188,7 +6188,7 @@
           <a:lstStyle/>
           <a:p>
             <a:r>
-              <a:rPr sz="1517" b="1">
+              <a:rPr sz="1550" b="1">
                 <a:solidFill>
                   <a:srgbClr val="1F5FD1"/>
                 </a:solidFill>
@@ -6262,7 +6262,7 @@
           <a:noFill/>
         </p:spPr>
         <p:txBody>
-          <a:bodyPr wrap="square" anchor="t" lIns="28800" rIns="28800" tIns="28800" bIns="28800">
+          <a:bodyPr wrap="square" anchor="ctr" lIns="28800" rIns="28800" tIns="28800" bIns="28800">
             <a:noAutofit/>
           </a:bodyPr>
           <a:lstStyle/>
@@ -6275,13 +6275,13 @@
                 <a:spcPts val="0"/>
               </a:spcBef>
               <a:spcAft>
-                <a:spcPts val="1000"/>
+                <a:spcPts val="1800"/>
               </a:spcAft>
               <a:buFont typeface="Segoe UI Symbol"/>
               <a:buChar char="✓"/>
             </a:pPr>
             <a:r>
-              <a:rPr sz="1417" b="0">
+              <a:rPr sz="1450" b="0">
                 <a:solidFill>
                   <a:srgbClr val="1F2A44"/>
                 </a:solidFill>
@@ -6301,13 +6301,13 @@
                 <a:spcPts val="0"/>
               </a:spcBef>
               <a:spcAft>
-                <a:spcPts val="1000"/>
+                <a:spcPts val="1800"/>
               </a:spcAft>
               <a:buFont typeface="Segoe UI Symbol"/>
               <a:buChar char="✓"/>
             </a:pPr>
             <a:r>
-              <a:rPr sz="1417" b="0">
+              <a:rPr sz="1450" b="0">
                 <a:solidFill>
                   <a:srgbClr val="1F2A44"/>
                 </a:solidFill>
@@ -6391,7 +6391,7 @@
           <a:lstStyle/>
           <a:p>
             <a:r>
-              <a:rPr sz="1517" b="1">
+              <a:rPr sz="1550" b="1">
                 <a:solidFill>
                   <a:srgbClr val="1F5FD1"/>
                 </a:solidFill>
@@ -6465,7 +6465,7 @@
           <a:noFill/>
         </p:spPr>
         <p:txBody>
-          <a:bodyPr wrap="square" anchor="t" lIns="28800" rIns="28800" tIns="28800" bIns="28800">
+          <a:bodyPr wrap="square" anchor="ctr" lIns="28800" rIns="28800" tIns="28800" bIns="28800">
             <a:noAutofit/>
           </a:bodyPr>
           <a:lstStyle/>
@@ -6478,13 +6478,13 @@
                 <a:spcPts val="0"/>
               </a:spcBef>
               <a:spcAft>
-                <a:spcPts val="1000"/>
+                <a:spcPts val="1800"/>
               </a:spcAft>
               <a:buFont typeface="Segoe UI Symbol"/>
               <a:buChar char="✓"/>
             </a:pPr>
             <a:r>
-              <a:rPr sz="1417" b="0">
+              <a:rPr sz="1450" b="0">
                 <a:solidFill>
                   <a:srgbClr val="1F2A44"/>
                 </a:solidFill>
@@ -6504,13 +6504,13 @@
                 <a:spcPts val="0"/>
               </a:spcBef>
               <a:spcAft>
-                <a:spcPts val="1000"/>
+                <a:spcPts val="1800"/>
               </a:spcAft>
               <a:buFont typeface="Segoe UI Symbol"/>
               <a:buChar char="✓"/>
             </a:pPr>
             <a:r>
-              <a:rPr sz="1417" b="0">
+              <a:rPr sz="1450" b="0">
                 <a:solidFill>
                   <a:srgbClr val="1F2A44"/>
                 </a:solidFill>
@@ -6594,7 +6594,7 @@
           <a:lstStyle/>
           <a:p>
             <a:r>
-              <a:rPr sz="1517" b="1">
+              <a:rPr sz="1550" b="1">
                 <a:solidFill>
                   <a:srgbClr val="1F5FD1"/>
                 </a:solidFill>
@@ -6668,7 +6668,7 @@
           <a:noFill/>
         </p:spPr>
         <p:txBody>
-          <a:bodyPr wrap="square" anchor="t" lIns="28800" rIns="28800" tIns="28800" bIns="28800">
+          <a:bodyPr wrap="square" anchor="ctr" lIns="28800" rIns="28800" tIns="28800" bIns="28800">
             <a:noAutofit/>
           </a:bodyPr>
           <a:lstStyle/>
@@ -6681,13 +6681,13 @@
                 <a:spcPts val="0"/>
               </a:spcBef>
               <a:spcAft>
-                <a:spcPts val="1000"/>
+                <a:spcPts val="1800"/>
               </a:spcAft>
               <a:buFont typeface="Segoe UI Symbol"/>
               <a:buChar char="✓"/>
             </a:pPr>
             <a:r>
-              <a:rPr sz="1417" b="0">
+              <a:rPr sz="1450" b="0">
                 <a:solidFill>
                   <a:srgbClr val="1F2A44"/>
                 </a:solidFill>
@@ -6707,13 +6707,13 @@
                 <a:spcPts val="0"/>
               </a:spcBef>
               <a:spcAft>
-                <a:spcPts val="1000"/>
+                <a:spcPts val="1800"/>
               </a:spcAft>
               <a:buFont typeface="Segoe UI Symbol"/>
               <a:buChar char="✓"/>
             </a:pPr>
             <a:r>
-              <a:rPr sz="1417" b="0">
+              <a:rPr sz="1450" b="0">
                 <a:solidFill>
                   <a:srgbClr val="1F2A44"/>
                 </a:solidFill>
@@ -6797,7 +6797,7 @@
           <a:lstStyle/>
           <a:p>
             <a:r>
-              <a:rPr sz="1517" b="1">
+              <a:rPr sz="1550" b="1">
                 <a:solidFill>
                   <a:srgbClr val="1F5FD1"/>
                 </a:solidFill>
@@ -6871,7 +6871,7 @@
           <a:noFill/>
         </p:spPr>
         <p:txBody>
-          <a:bodyPr wrap="square" anchor="t" lIns="28800" rIns="28800" tIns="28800" bIns="28800">
+          <a:bodyPr wrap="square" anchor="ctr" lIns="28800" rIns="28800" tIns="28800" bIns="28800">
             <a:noAutofit/>
           </a:bodyPr>
           <a:lstStyle/>
@@ -6884,13 +6884,13 @@
                 <a:spcPts val="0"/>
               </a:spcBef>
               <a:spcAft>
-                <a:spcPts val="1000"/>
+                <a:spcPts val="1800"/>
               </a:spcAft>
               <a:buFont typeface="Segoe UI Symbol"/>
               <a:buChar char="✓"/>
             </a:pPr>
             <a:r>
-              <a:rPr sz="1417" b="0">
+              <a:rPr sz="1450" b="0">
                 <a:solidFill>
                   <a:srgbClr val="1F2A44"/>
                 </a:solidFill>
@@ -6910,13 +6910,13 @@
                 <a:spcPts val="0"/>
               </a:spcBef>
               <a:spcAft>
-                <a:spcPts val="1000"/>
+                <a:spcPts val="1800"/>
               </a:spcAft>
               <a:buFont typeface="Segoe UI Symbol"/>
               <a:buChar char="✓"/>
             </a:pPr>
             <a:r>
-              <a:rPr sz="1417" b="0">
+              <a:rPr sz="1450" b="0">
                 <a:solidFill>
                   <a:srgbClr val="1F2A44"/>
                 </a:solidFill>
@@ -7000,7 +7000,7 @@
           <a:lstStyle/>
           <a:p>
             <a:r>
-              <a:rPr sz="1517" b="1">
+              <a:rPr sz="1550" b="1">
                 <a:solidFill>
                   <a:srgbClr val="1F5FD1"/>
                 </a:solidFill>
@@ -7074,7 +7074,7 @@
           <a:noFill/>
         </p:spPr>
         <p:txBody>
-          <a:bodyPr wrap="square" anchor="t" lIns="28800" rIns="28800" tIns="28800" bIns="28800">
+          <a:bodyPr wrap="square" anchor="ctr" lIns="28800" rIns="28800" tIns="28800" bIns="28800">
             <a:noAutofit/>
           </a:bodyPr>
           <a:lstStyle/>
@@ -7087,13 +7087,13 @@
                 <a:spcPts val="0"/>
               </a:spcBef>
               <a:spcAft>
-                <a:spcPts val="1000"/>
+                <a:spcPts val="1800"/>
               </a:spcAft>
               <a:buFont typeface="Segoe UI Symbol"/>
               <a:buChar char="✓"/>
             </a:pPr>
             <a:r>
-              <a:rPr sz="1417" b="0">
+              <a:rPr sz="1450" b="0">
                 <a:solidFill>
                   <a:srgbClr val="1F2A44"/>
                 </a:solidFill>
@@ -7113,13 +7113,13 @@
                 <a:spcPts val="0"/>
               </a:spcBef>
               <a:spcAft>
-                <a:spcPts val="1000"/>
+                <a:spcPts val="1800"/>
               </a:spcAft>
               <a:buFont typeface="Segoe UI Symbol"/>
               <a:buChar char="✓"/>
             </a:pPr>
             <a:r>
-              <a:rPr sz="1417" b="0">
+              <a:rPr sz="1450" b="0">
                 <a:solidFill>
                   <a:srgbClr val="1F2A44"/>
                 </a:solidFill>
@@ -7835,7 +7835,7 @@
         </p:nvGraphicFramePr>
         <p:xfrm>
           <a:off x="324000" y="1998000"/>
-          <a:ext cx="4949216" cy="1587715"/>
+          <a:ext cx="4949216" cy="2717415"/>
         </p:xfrm>
         <a:graphic>
           <a:graphicData uri="http://schemas.openxmlformats.org/drawingml/2006/table">
@@ -7846,7 +7846,7 @@
                 <a:gridCol w="2474608"/>
                 <a:gridCol w="1814713"/>
               </a:tblGrid>
-              <a:tr h="317543">
+              <a:tr h="543483">
                 <a:tc>
                   <a:txBody>
                     <a:bodyPr wrap="square"/>
@@ -8013,7 +8013,7 @@
                   </a:tcPr>
                 </a:tc>
               </a:tr>
-              <a:tr h="317543">
+              <a:tr h="543483">
                 <a:tc>
                   <a:txBody>
                     <a:bodyPr wrap="square"/>
@@ -8180,7 +8180,7 @@
                   </a:tcPr>
                 </a:tc>
               </a:tr>
-              <a:tr h="317543">
+              <a:tr h="543483">
                 <a:tc>
                   <a:txBody>
                     <a:bodyPr wrap="square"/>
@@ -8347,7 +8347,7 @@
                   </a:tcPr>
                 </a:tc>
               </a:tr>
-              <a:tr h="317543">
+              <a:tr h="543483">
                 <a:tc>
                   <a:txBody>
                     <a:bodyPr wrap="square"/>
@@ -8514,7 +8514,7 @@
                   </a:tcPr>
                 </a:tc>
               </a:tr>
-              <a:tr h="317543">
+              <a:tr h="543483">
                 <a:tc>
                   <a:txBody>
                     <a:bodyPr wrap="square"/>
@@ -8693,8 +8693,8 @@
         </p:nvSpPr>
         <p:spPr>
           <a:xfrm>
-            <a:off x="324000" y="3693718"/>
-            <a:ext cx="4949217" cy="2786281"/>
+            <a:off x="324000" y="4823419"/>
+            <a:ext cx="4949217" cy="1656580"/>
           </a:xfrm>
           <a:prstGeom prst="rect">
             <a:avLst/>
@@ -8702,7 +8702,7 @@
           <a:noFill/>
         </p:spPr>
         <p:txBody>
-          <a:bodyPr wrap="square" anchor="t" lIns="43200" rIns="43200" tIns="43200" bIns="43200">
+          <a:bodyPr wrap="square" anchor="ctr" lIns="43200" rIns="43200" tIns="43200" bIns="43200">
             <a:noAutofit/>
           </a:bodyPr>
           <a:lstStyle/>
@@ -8712,7 +8712,7 @@
                 <a:spcPct val="120000"/>
               </a:lnSpc>
               <a:spcBef>
-                <a:spcPts val="1700"/>
+                <a:spcPts val="2700"/>
               </a:spcBef>
               <a:spcAft>
                 <a:spcPts val="0"/>
@@ -8721,7 +8721,7 @@
               <a:buChar char="•"/>
             </a:pPr>
             <a:r>
-              <a:rPr sz="1437" b="0">
+              <a:rPr sz="1450" b="0">
                 <a:solidFill>
                   <a:srgbClr val="1F2A44"/>
                 </a:solidFill>
@@ -11322,7 +11322,7 @@
         </p:nvGraphicFramePr>
         <p:xfrm>
           <a:off x="6785018" y="1800000"/>
-          <a:ext cx="4994181" cy="1270172"/>
+          <a:ext cx="4994181" cy="2435348"/>
         </p:xfrm>
         <a:graphic>
           <a:graphicData uri="http://schemas.openxmlformats.org/drawingml/2006/table">
@@ -11332,7 +11332,7 @@
                 <a:gridCol w="1664727"/>
                 <a:gridCol w="3329454"/>
               </a:tblGrid>
-              <a:tr h="317543">
+              <a:tr h="608837">
                 <a:tc>
                   <a:txBody>
                     <a:bodyPr wrap="square"/>
@@ -11444,7 +11444,7 @@
                   </a:tcPr>
                 </a:tc>
               </a:tr>
-              <a:tr h="317543">
+              <a:tr h="608837">
                 <a:tc>
                   <a:txBody>
                     <a:bodyPr wrap="square"/>
@@ -11556,7 +11556,7 @@
                   </a:tcPr>
                 </a:tc>
               </a:tr>
-              <a:tr h="317543">
+              <a:tr h="608837">
                 <a:tc>
                   <a:txBody>
                     <a:bodyPr wrap="square"/>
@@ -11668,7 +11668,7 @@
                   </a:tcPr>
                 </a:tc>
               </a:tr>
-              <a:tr h="317543">
+              <a:tr h="608837">
                 <a:tc>
                   <a:txBody>
                     <a:bodyPr wrap="square"/>
@@ -11792,8 +11792,8 @@
         </p:nvSpPr>
         <p:spPr>
           <a:xfrm>
-            <a:off x="6785018" y="3178174"/>
-            <a:ext cx="4994181" cy="3229825"/>
+            <a:off x="6785018" y="4343348"/>
+            <a:ext cx="4994181" cy="2064651"/>
           </a:xfrm>
           <a:prstGeom prst="rect">
             <a:avLst/>
@@ -11801,7 +11801,7 @@
           <a:noFill/>
         </p:spPr>
         <p:txBody>
-          <a:bodyPr wrap="square" anchor="t" lIns="43200" rIns="43200" tIns="43200" bIns="43200">
+          <a:bodyPr wrap="square" anchor="ctr" lIns="43200" rIns="43200" tIns="43200" bIns="43200">
             <a:noAutofit/>
           </a:bodyPr>
           <a:lstStyle/>
@@ -11811,7 +11811,7 @@
                 <a:spcPct val="120000"/>
               </a:lnSpc>
               <a:spcBef>
-                <a:spcPts val="1700"/>
+                <a:spcPts val="2700"/>
               </a:spcBef>
               <a:spcAft>
                 <a:spcPts val="0"/>
@@ -11820,7 +11820,7 @@
               <a:buChar char="•"/>
             </a:pPr>
             <a:r>
-              <a:rPr sz="1437" b="0">
+              <a:rPr sz="1450" b="0">
                 <a:solidFill>
                   <a:srgbClr val="1F2A44"/>
                 </a:solidFill>
@@ -11837,7 +11837,7 @@
                 <a:spcPct val="120000"/>
               </a:lnSpc>
               <a:spcBef>
-                <a:spcPts val="1700"/>
+                <a:spcPts val="2700"/>
               </a:spcBef>
               <a:spcAft>
                 <a:spcPts val="0"/>
@@ -11846,7 +11846,7 @@
               <a:buChar char="•"/>
             </a:pPr>
             <a:r>
-              <a:rPr sz="1437" b="0">
+              <a:rPr sz="1450" b="0">
                 <a:solidFill>
                   <a:srgbClr val="1F2A44"/>
                 </a:solidFill>
@@ -12981,7 +12981,7 @@
           <a:lstStyle/>
           <a:p>
             <a:r>
-              <a:rPr sz="1450" b="1">
+              <a:rPr sz="1550" b="1">
                 <a:solidFill>
                   <a:srgbClr val="1F5FD1"/>
                 </a:solidFill>
@@ -13055,7 +13055,7 @@
           <a:noFill/>
         </p:spPr>
         <p:txBody>
-          <a:bodyPr wrap="square" anchor="t" lIns="28800" rIns="28800" tIns="28800" bIns="28800">
+          <a:bodyPr wrap="square" anchor="ctr" lIns="28800" rIns="28800" tIns="28800" bIns="28800">
             <a:noAutofit/>
           </a:bodyPr>
           <a:lstStyle/>
@@ -13068,13 +13068,13 @@
                 <a:spcPts val="0"/>
               </a:spcBef>
               <a:spcAft>
-                <a:spcPts val="1000"/>
+                <a:spcPts val="1800"/>
               </a:spcAft>
               <a:buFont typeface="Segoe UI Symbol"/>
               <a:buChar char="✓"/>
             </a:pPr>
             <a:r>
-              <a:rPr sz="1350" b="0">
+              <a:rPr sz="1450" b="0">
                 <a:solidFill>
                   <a:srgbClr val="1F2A44"/>
                 </a:solidFill>
@@ -13094,13 +13094,13 @@
                 <a:spcPts val="0"/>
               </a:spcBef>
               <a:spcAft>
-                <a:spcPts val="1000"/>
+                <a:spcPts val="1800"/>
               </a:spcAft>
               <a:buFont typeface="Segoe UI Symbol"/>
               <a:buChar char="✓"/>
             </a:pPr>
             <a:r>
-              <a:rPr sz="1350" b="0">
+              <a:rPr sz="1450" b="0">
                 <a:solidFill>
                   <a:srgbClr val="1F2A44"/>
                 </a:solidFill>
@@ -13184,7 +13184,7 @@
           <a:lstStyle/>
           <a:p>
             <a:r>
-              <a:rPr sz="1450" b="1">
+              <a:rPr sz="1550" b="1">
                 <a:solidFill>
                   <a:srgbClr val="1F5FD1"/>
                 </a:solidFill>
@@ -13258,7 +13258,7 @@
           <a:noFill/>
         </p:spPr>
         <p:txBody>
-          <a:bodyPr wrap="square" anchor="t" lIns="28800" rIns="28800" tIns="28800" bIns="28800">
+          <a:bodyPr wrap="square" anchor="ctr" lIns="28800" rIns="28800" tIns="28800" bIns="28800">
             <a:noAutofit/>
           </a:bodyPr>
           <a:lstStyle/>
@@ -13271,13 +13271,13 @@
                 <a:spcPts val="0"/>
               </a:spcBef>
               <a:spcAft>
-                <a:spcPts val="1000"/>
+                <a:spcPts val="1800"/>
               </a:spcAft>
               <a:buFont typeface="Segoe UI Symbol"/>
               <a:buChar char="✓"/>
             </a:pPr>
             <a:r>
-              <a:rPr sz="1350" b="0">
+              <a:rPr sz="1450" b="0">
                 <a:solidFill>
                   <a:srgbClr val="1F2A44"/>
                 </a:solidFill>
@@ -13297,13 +13297,13 @@
                 <a:spcPts val="0"/>
               </a:spcBef>
               <a:spcAft>
-                <a:spcPts val="1000"/>
+                <a:spcPts val="1800"/>
               </a:spcAft>
               <a:buFont typeface="Segoe UI Symbol"/>
               <a:buChar char="✓"/>
             </a:pPr>
             <a:r>
-              <a:rPr sz="1350" b="0">
+              <a:rPr sz="1450" b="0">
                 <a:solidFill>
                   <a:srgbClr val="1F2A44"/>
                 </a:solidFill>
@@ -13387,7 +13387,7 @@
           <a:lstStyle/>
           <a:p>
             <a:r>
-              <a:rPr sz="1450" b="1">
+              <a:rPr sz="1550" b="1">
                 <a:solidFill>
                   <a:srgbClr val="1F5FD1"/>
                 </a:solidFill>
@@ -13461,7 +13461,7 @@
           <a:noFill/>
         </p:spPr>
         <p:txBody>
-          <a:bodyPr wrap="square" anchor="t" lIns="28800" rIns="28800" tIns="28800" bIns="28800">
+          <a:bodyPr wrap="square" anchor="ctr" lIns="28800" rIns="28800" tIns="28800" bIns="28800">
             <a:noAutofit/>
           </a:bodyPr>
           <a:lstStyle/>
@@ -13474,13 +13474,13 @@
                 <a:spcPts val="0"/>
               </a:spcBef>
               <a:spcAft>
-                <a:spcPts val="1000"/>
+                <a:spcPts val="1800"/>
               </a:spcAft>
               <a:buFont typeface="Segoe UI Symbol"/>
               <a:buChar char="✓"/>
             </a:pPr>
             <a:r>
-              <a:rPr sz="1350" b="0">
+              <a:rPr sz="1450" b="0">
                 <a:solidFill>
                   <a:srgbClr val="1F2A44"/>
                 </a:solidFill>
@@ -13500,13 +13500,13 @@
                 <a:spcPts val="0"/>
               </a:spcBef>
               <a:spcAft>
-                <a:spcPts val="1000"/>
+                <a:spcPts val="1800"/>
               </a:spcAft>
               <a:buFont typeface="Segoe UI Symbol"/>
               <a:buChar char="✓"/>
             </a:pPr>
             <a:r>
-              <a:rPr sz="1350" b="0">
+              <a:rPr sz="1450" b="0">
                 <a:solidFill>
                   <a:srgbClr val="1F2A44"/>
                 </a:solidFill>
@@ -13590,7 +13590,7 @@
           <a:lstStyle/>
           <a:p>
             <a:r>
-              <a:rPr sz="1450" b="1">
+              <a:rPr sz="1550" b="1">
                 <a:solidFill>
                   <a:srgbClr val="1F5FD1"/>
                 </a:solidFill>
@@ -13664,7 +13664,7 @@
           <a:noFill/>
         </p:spPr>
         <p:txBody>
-          <a:bodyPr wrap="square" anchor="t" lIns="28800" rIns="28800" tIns="28800" bIns="28800">
+          <a:bodyPr wrap="square" anchor="ctr" lIns="28800" rIns="28800" tIns="28800" bIns="28800">
             <a:noAutofit/>
           </a:bodyPr>
           <a:lstStyle/>
@@ -13677,13 +13677,13 @@
                 <a:spcPts val="0"/>
               </a:spcBef>
               <a:spcAft>
-                <a:spcPts val="1000"/>
+                <a:spcPts val="1800"/>
               </a:spcAft>
               <a:buFont typeface="Segoe UI Symbol"/>
               <a:buChar char="✓"/>
             </a:pPr>
             <a:r>
-              <a:rPr sz="1350" b="0">
+              <a:rPr sz="1450" b="0">
                 <a:solidFill>
                   <a:srgbClr val="1F2A44"/>
                 </a:solidFill>
@@ -13703,13 +13703,13 @@
                 <a:spcPts val="0"/>
               </a:spcBef>
               <a:spcAft>
-                <a:spcPts val="1000"/>
+                <a:spcPts val="1800"/>
               </a:spcAft>
               <a:buFont typeface="Segoe UI Symbol"/>
               <a:buChar char="✓"/>
             </a:pPr>
             <a:r>
-              <a:rPr sz="1350" b="0">
+              <a:rPr sz="1450" b="0">
                 <a:solidFill>
                   <a:srgbClr val="1F2A44"/>
                 </a:solidFill>
@@ -13732,7 +13732,7 @@
         </p:nvGraphicFramePr>
         <p:xfrm>
           <a:off x="6695018" y="1620000"/>
-          <a:ext cx="5174181" cy="1587715"/>
+          <a:ext cx="5174181" cy="2786330"/>
         </p:xfrm>
         <a:graphic>
           <a:graphicData uri="http://schemas.openxmlformats.org/drawingml/2006/table">
@@ -13742,7 +13742,7 @@
                 <a:gridCol w="1521818"/>
                 <a:gridCol w="3652363"/>
               </a:tblGrid>
-              <a:tr h="317543">
+              <a:tr h="557266">
                 <a:tc>
                   <a:txBody>
                     <a:bodyPr wrap="square"/>
@@ -13854,7 +13854,7 @@
                   </a:tcPr>
                 </a:tc>
               </a:tr>
-              <a:tr h="317543">
+              <a:tr h="557266">
                 <a:tc>
                   <a:txBody>
                     <a:bodyPr wrap="square"/>
@@ -13966,7 +13966,7 @@
                   </a:tcPr>
                 </a:tc>
               </a:tr>
-              <a:tr h="317543">
+              <a:tr h="557266">
                 <a:tc>
                   <a:txBody>
                     <a:bodyPr wrap="square"/>
@@ -14078,7 +14078,7 @@
                   </a:tcPr>
                 </a:tc>
               </a:tr>
-              <a:tr h="317543">
+              <a:tr h="557266">
                 <a:tc>
                   <a:txBody>
                     <a:bodyPr wrap="square"/>
@@ -14190,7 +14190,7 @@
                   </a:tcPr>
                 </a:tc>
               </a:tr>
-              <a:tr h="317543">
+              <a:tr h="557266">
                 <a:tc>
                   <a:txBody>
                     <a:bodyPr wrap="square"/>
@@ -14314,8 +14314,8 @@
         </p:nvSpPr>
         <p:spPr>
           <a:xfrm>
-            <a:off x="6695018" y="3315718"/>
-            <a:ext cx="5174181" cy="3164281"/>
+            <a:off x="6695018" y="4514334"/>
+            <a:ext cx="5174181" cy="1965665"/>
           </a:xfrm>
           <a:prstGeom prst="rect">
             <a:avLst/>
@@ -14323,7 +14323,7 @@
           <a:noFill/>
         </p:spPr>
         <p:txBody>
-          <a:bodyPr wrap="square" anchor="t" lIns="43200" rIns="43200" tIns="43200" bIns="43200">
+          <a:bodyPr wrap="square" anchor="ctr" lIns="43200" rIns="43200" tIns="43200" bIns="43200">
             <a:noAutofit/>
           </a:bodyPr>
           <a:lstStyle/>
@@ -14333,7 +14333,7 @@
                 <a:spcPct val="120000"/>
               </a:lnSpc>
               <a:spcBef>
-                <a:spcPts val="1700"/>
+                <a:spcPts val="2700"/>
               </a:spcBef>
               <a:spcAft>
                 <a:spcPts val="0"/>
@@ -14342,7 +14342,7 @@
               <a:buChar char="•"/>
             </a:pPr>
             <a:r>
-              <a:rPr sz="1437" b="0">
+              <a:rPr sz="1450" b="0">
                 <a:solidFill>
                   <a:srgbClr val="1F2A44"/>
                 </a:solidFill>
@@ -14359,7 +14359,7 @@
                 <a:spcPct val="120000"/>
               </a:lnSpc>
               <a:spcBef>
-                <a:spcPts val="1700"/>
+                <a:spcPts val="2700"/>
               </a:spcBef>
               <a:spcAft>
                 <a:spcPts val="0"/>
@@ -14368,7 +14368,7 @@
               <a:buChar char="•"/>
             </a:pPr>
             <a:r>
-              <a:rPr sz="1437" b="0">
+              <a:rPr sz="1450" b="0">
                 <a:solidFill>
                   <a:srgbClr val="1F2A44"/>
                 </a:solidFill>
@@ -15211,7 +15211,7 @@
         <p:spPr>
           <a:xfrm>
             <a:off x="324000" y="1998000"/>
-            <a:ext cx="1274400" cy="786803"/>
+            <a:ext cx="1274400" cy="2090829"/>
           </a:xfrm>
           <a:prstGeom prst="roundRect">
             <a:avLst>
@@ -15304,7 +15304,7 @@
               </a:spcAft>
             </a:pPr>
             <a:r>
-              <a:rPr sz="1150" b="1">
+              <a:rPr sz="1285" b="1">
                 <a:solidFill>
                   <a:srgbClr val="FFFFFF"/>
                 </a:solidFill>
@@ -15326,7 +15326,7 @@
         <p:spPr>
           <a:xfrm>
             <a:off x="367200" y="2340000"/>
-            <a:ext cx="1188000" cy="426803"/>
+            <a:ext cx="1188000" cy="1730829"/>
           </a:xfrm>
           <a:prstGeom prst="rect">
             <a:avLst/>
@@ -15351,7 +15351,7 @@
               </a:spcAft>
             </a:pPr>
             <a:r>
-              <a:rPr sz="1092" b="0">
+              <a:rPr sz="1420" b="0">
                 <a:solidFill>
                   <a:srgbClr val="1F2A44"/>
                 </a:solidFill>
@@ -15372,7 +15372,7 @@
         </p:nvSpPr>
         <p:spPr>
           <a:xfrm>
-            <a:off x="1627200" y="2283401"/>
+            <a:off x="1627200" y="2935414"/>
             <a:ext cx="140400" cy="216000"/>
           </a:xfrm>
           <a:prstGeom prst="rightArrow">
@@ -15417,7 +15417,7 @@
         <p:spPr>
           <a:xfrm>
             <a:off x="1796400" y="1998000"/>
-            <a:ext cx="1274400" cy="786803"/>
+            <a:ext cx="1274400" cy="2090829"/>
           </a:xfrm>
           <a:prstGeom prst="roundRect">
             <a:avLst>
@@ -15510,7 +15510,7 @@
               </a:spcAft>
             </a:pPr>
             <a:r>
-              <a:rPr sz="1150" b="1">
+              <a:rPr sz="1285" b="1">
                 <a:solidFill>
                   <a:srgbClr val="FFFFFF"/>
                 </a:solidFill>
@@ -15532,7 +15532,7 @@
         <p:spPr>
           <a:xfrm>
             <a:off x="1839600" y="2340000"/>
-            <a:ext cx="1188000" cy="426803"/>
+            <a:ext cx="1188000" cy="1730829"/>
           </a:xfrm>
           <a:prstGeom prst="rect">
             <a:avLst/>
@@ -15557,7 +15557,7 @@
               </a:spcAft>
             </a:pPr>
             <a:r>
-              <a:rPr sz="1092" b="0">
+              <a:rPr sz="1420" b="0">
                 <a:solidFill>
                   <a:srgbClr val="1F2A44"/>
                 </a:solidFill>
@@ -15578,7 +15578,7 @@
         </p:nvSpPr>
         <p:spPr>
           <a:xfrm>
-            <a:off x="3099600" y="2283401"/>
+            <a:off x="3099600" y="2935414"/>
             <a:ext cx="140400" cy="216000"/>
           </a:xfrm>
           <a:prstGeom prst="rightArrow">
@@ -15623,7 +15623,7 @@
         <p:spPr>
           <a:xfrm>
             <a:off x="3268800" y="1998000"/>
-            <a:ext cx="1274400" cy="786803"/>
+            <a:ext cx="1274400" cy="2090829"/>
           </a:xfrm>
           <a:prstGeom prst="roundRect">
             <a:avLst>
@@ -15716,7 +15716,7 @@
               </a:spcAft>
             </a:pPr>
             <a:r>
-              <a:rPr sz="1150" b="1">
+              <a:rPr sz="1285" b="1">
                 <a:solidFill>
                   <a:srgbClr val="FFFFFF"/>
                 </a:solidFill>
@@ -15738,7 +15738,7 @@
         <p:spPr>
           <a:xfrm>
             <a:off x="3311999" y="2340000"/>
-            <a:ext cx="1188000" cy="426803"/>
+            <a:ext cx="1188000" cy="1730829"/>
           </a:xfrm>
           <a:prstGeom prst="rect">
             <a:avLst/>
@@ -15763,7 +15763,7 @@
               </a:spcAft>
             </a:pPr>
             <a:r>
-              <a:rPr sz="1092" b="0">
+              <a:rPr sz="1420" b="0">
                 <a:solidFill>
                   <a:srgbClr val="1F2A44"/>
                 </a:solidFill>
@@ -15784,7 +15784,7 @@
         </p:nvSpPr>
         <p:spPr>
           <a:xfrm>
-            <a:off x="4572000" y="2283401"/>
+            <a:off x="4572000" y="2935414"/>
             <a:ext cx="140400" cy="216000"/>
           </a:xfrm>
           <a:prstGeom prst="rightArrow">
@@ -15829,7 +15829,7 @@
         <p:spPr>
           <a:xfrm>
             <a:off x="4741200" y="1998000"/>
-            <a:ext cx="1274400" cy="786803"/>
+            <a:ext cx="1274400" cy="2090829"/>
           </a:xfrm>
           <a:prstGeom prst="roundRect">
             <a:avLst>
@@ -15922,7 +15922,7 @@
               </a:spcAft>
             </a:pPr>
             <a:r>
-              <a:rPr sz="1150" b="1">
+              <a:rPr sz="1285" b="1">
                 <a:solidFill>
                   <a:srgbClr val="FFFFFF"/>
                 </a:solidFill>
@@ -15944,7 +15944,7 @@
         <p:spPr>
           <a:xfrm>
             <a:off x="4784400" y="2340000"/>
-            <a:ext cx="1188000" cy="426803"/>
+            <a:ext cx="1188000" cy="1730829"/>
           </a:xfrm>
           <a:prstGeom prst="rect">
             <a:avLst/>
@@ -15969,7 +15969,7 @@
               </a:spcAft>
             </a:pPr>
             <a:r>
-              <a:rPr sz="1092" b="0">
+              <a:rPr sz="1420" b="0">
                 <a:solidFill>
                   <a:srgbClr val="1F2A44"/>
                 </a:solidFill>
@@ -15990,8 +15990,8 @@
         </p:nvSpPr>
         <p:spPr>
           <a:xfrm>
-            <a:off x="324000" y="2892803"/>
-            <a:ext cx="5691600" cy="3083196"/>
+            <a:off x="324000" y="4196829"/>
+            <a:ext cx="5691600" cy="1779170"/>
           </a:xfrm>
           <a:prstGeom prst="rect">
             <a:avLst/>
@@ -15999,7 +15999,7 @@
           <a:noFill/>
         </p:spPr>
         <p:txBody>
-          <a:bodyPr wrap="square" anchor="t" lIns="43200" rIns="43200" tIns="43200" bIns="43200">
+          <a:bodyPr wrap="square" anchor="ctr" lIns="43200" rIns="43200" tIns="43200" bIns="43200">
             <a:noAutofit/>
           </a:bodyPr>
           <a:lstStyle/>
@@ -16009,7 +16009,7 @@
                 <a:spcPct val="120000"/>
               </a:lnSpc>
               <a:spcBef>
-                <a:spcPts val="1700"/>
+                <a:spcPts val="2458"/>
               </a:spcBef>
               <a:spcAft>
                 <a:spcPts val="0"/>
@@ -16018,7 +16018,7 @@
               <a:buChar char="•"/>
             </a:pPr>
             <a:r>
-              <a:rPr sz="1437" b="0">
+              <a:rPr sz="1450" b="0">
                 <a:solidFill>
                   <a:srgbClr val="1F2A44"/>
                 </a:solidFill>
@@ -16035,7 +16035,7 @@
                 <a:spcPct val="120000"/>
               </a:lnSpc>
               <a:spcBef>
-                <a:spcPts val="1700"/>
+                <a:spcPts val="2458"/>
               </a:spcBef>
               <a:spcAft>
                 <a:spcPts val="0"/>
@@ -16044,7 +16044,7 @@
               <a:buChar char="•"/>
             </a:pPr>
             <a:r>
-              <a:rPr sz="1437" b="0">
+              <a:rPr sz="1450" b="0">
                 <a:solidFill>
                   <a:srgbClr val="1F2A44"/>
                 </a:solidFill>
@@ -16146,7 +16146,7 @@
         <p:spPr>
           <a:xfrm>
             <a:off x="6177600" y="1998000"/>
-            <a:ext cx="1274400" cy="786803"/>
+            <a:ext cx="1274400" cy="2210914"/>
           </a:xfrm>
           <a:prstGeom prst="roundRect">
             <a:avLst>
@@ -16239,7 +16239,7 @@
               </a:spcAft>
             </a:pPr>
             <a:r>
-              <a:rPr sz="1150" b="1">
+              <a:rPr sz="1285" b="1">
                 <a:solidFill>
                   <a:srgbClr val="FFFFFF"/>
                 </a:solidFill>
@@ -16261,7 +16261,7 @@
         <p:spPr>
           <a:xfrm>
             <a:off x="6220800" y="2340000"/>
-            <a:ext cx="1188000" cy="426803"/>
+            <a:ext cx="1188000" cy="1850914"/>
           </a:xfrm>
           <a:prstGeom prst="rect">
             <a:avLst/>
@@ -16286,7 +16286,7 @@
               </a:spcAft>
             </a:pPr>
             <a:r>
-              <a:rPr sz="1092" b="0">
+              <a:rPr sz="1420" b="0">
                 <a:solidFill>
                   <a:srgbClr val="1F2A44"/>
                 </a:solidFill>
@@ -16307,7 +16307,7 @@
         </p:nvSpPr>
         <p:spPr>
           <a:xfrm>
-            <a:off x="7480799" y="2283401"/>
+            <a:off x="7480799" y="2995457"/>
             <a:ext cx="140400" cy="216000"/>
           </a:xfrm>
           <a:prstGeom prst="rightArrow">
@@ -16352,7 +16352,7 @@
         <p:spPr>
           <a:xfrm>
             <a:off x="7650000" y="1998000"/>
-            <a:ext cx="1274400" cy="786803"/>
+            <a:ext cx="1274400" cy="2210914"/>
           </a:xfrm>
           <a:prstGeom prst="roundRect">
             <a:avLst>
@@ -16445,7 +16445,7 @@
               </a:spcAft>
             </a:pPr>
             <a:r>
-              <a:rPr sz="1150" b="1">
+              <a:rPr sz="1285" b="1">
                 <a:solidFill>
                   <a:srgbClr val="FFFFFF"/>
                 </a:solidFill>
@@ -16467,7 +16467,7 @@
         <p:spPr>
           <a:xfrm>
             <a:off x="7693200" y="2340000"/>
-            <a:ext cx="1188000" cy="426803"/>
+            <a:ext cx="1188000" cy="1850914"/>
           </a:xfrm>
           <a:prstGeom prst="rect">
             <a:avLst/>
@@ -16492,7 +16492,7 @@
               </a:spcAft>
             </a:pPr>
             <a:r>
-              <a:rPr sz="1092" b="0">
+              <a:rPr sz="1420" b="0">
                 <a:solidFill>
                   <a:srgbClr val="1F2A44"/>
                 </a:solidFill>
@@ -16513,7 +16513,7 @@
         </p:nvSpPr>
         <p:spPr>
           <a:xfrm>
-            <a:off x="8953200" y="2283401"/>
+            <a:off x="8953200" y="2995457"/>
             <a:ext cx="140400" cy="216000"/>
           </a:xfrm>
           <a:prstGeom prst="rightArrow">
@@ -16558,7 +16558,7 @@
         <p:spPr>
           <a:xfrm>
             <a:off x="9122400" y="1998000"/>
-            <a:ext cx="1274400" cy="786803"/>
+            <a:ext cx="1274400" cy="2210914"/>
           </a:xfrm>
           <a:prstGeom prst="roundRect">
             <a:avLst>
@@ -16651,7 +16651,7 @@
               </a:spcAft>
             </a:pPr>
             <a:r>
-              <a:rPr sz="1150" b="1">
+              <a:rPr sz="1285" b="1">
                 <a:solidFill>
                   <a:srgbClr val="FFFFFF"/>
                 </a:solidFill>
@@ -16673,7 +16673,7 @@
         <p:spPr>
           <a:xfrm>
             <a:off x="9165600" y="2340000"/>
-            <a:ext cx="1188000" cy="426803"/>
+            <a:ext cx="1188000" cy="1850914"/>
           </a:xfrm>
           <a:prstGeom prst="rect">
             <a:avLst/>
@@ -16698,7 +16698,7 @@
               </a:spcAft>
             </a:pPr>
             <a:r>
-              <a:rPr sz="1092" b="0">
+              <a:rPr sz="1420" b="0">
                 <a:solidFill>
                   <a:srgbClr val="1F2A44"/>
                 </a:solidFill>
@@ -16719,7 +16719,7 @@
         </p:nvSpPr>
         <p:spPr>
           <a:xfrm>
-            <a:off x="10425599" y="2283401"/>
+            <a:off x="10425599" y="2995457"/>
             <a:ext cx="140400" cy="216000"/>
           </a:xfrm>
           <a:prstGeom prst="rightArrow">
@@ -16764,7 +16764,7 @@
         <p:spPr>
           <a:xfrm>
             <a:off x="10594800" y="1998000"/>
-            <a:ext cx="1274400" cy="786803"/>
+            <a:ext cx="1274400" cy="2210914"/>
           </a:xfrm>
           <a:prstGeom prst="roundRect">
             <a:avLst>
@@ -16857,7 +16857,7 @@
               </a:spcAft>
             </a:pPr>
             <a:r>
-              <a:rPr sz="1150" b="1">
+              <a:rPr sz="1285" b="1">
                 <a:solidFill>
                   <a:srgbClr val="FFFFFF"/>
                 </a:solidFill>
@@ -16879,7 +16879,7 @@
         <p:spPr>
           <a:xfrm>
             <a:off x="10638000" y="2340000"/>
-            <a:ext cx="1188000" cy="426803"/>
+            <a:ext cx="1188000" cy="1850914"/>
           </a:xfrm>
           <a:prstGeom prst="rect">
             <a:avLst/>
@@ -16904,7 +16904,7 @@
               </a:spcAft>
             </a:pPr>
             <a:r>
-              <a:rPr sz="1092" b="0">
+              <a:rPr sz="1420" b="0">
                 <a:solidFill>
                   <a:srgbClr val="1F2A44"/>
                 </a:solidFill>
@@ -16925,8 +16925,8 @@
         </p:nvSpPr>
         <p:spPr>
           <a:xfrm>
-            <a:off x="6177600" y="2892803"/>
-            <a:ext cx="5691600" cy="3083196"/>
+            <a:off x="6177600" y="4316914"/>
+            <a:ext cx="5691600" cy="1659085"/>
           </a:xfrm>
           <a:prstGeom prst="rect">
             <a:avLst/>
@@ -16934,7 +16934,7 @@
           <a:noFill/>
         </p:spPr>
         <p:txBody>
-          <a:bodyPr wrap="square" anchor="t" lIns="43200" rIns="43200" tIns="43200" bIns="43200">
+          <a:bodyPr wrap="square" anchor="ctr" lIns="43200" rIns="43200" tIns="43200" bIns="43200">
             <a:noAutofit/>
           </a:bodyPr>
           <a:lstStyle/>
@@ -16944,7 +16944,7 @@
                 <a:spcPct val="120000"/>
               </a:lnSpc>
               <a:spcBef>
-                <a:spcPts val="1700"/>
+                <a:spcPts val="2700"/>
               </a:spcBef>
               <a:spcAft>
                 <a:spcPts val="0"/>
@@ -16953,7 +16953,7 @@
               <a:buChar char="•"/>
             </a:pPr>
             <a:r>
-              <a:rPr sz="1437" b="0">
+              <a:rPr sz="1450" b="0">
                 <a:solidFill>
                   <a:srgbClr val="1F2A44"/>
                 </a:solidFill>
@@ -17860,7 +17860,7 @@
         <p:spPr>
           <a:xfrm>
             <a:off x="324000" y="1998000"/>
-            <a:ext cx="1459995" cy="825940"/>
+            <a:ext cx="1459995" cy="2462914"/>
           </a:xfrm>
           <a:prstGeom prst="roundRect">
             <a:avLst>
@@ -17953,7 +17953,7 @@
               </a:spcAft>
             </a:pPr>
             <a:r>
-              <a:rPr sz="1207" b="1">
+              <a:rPr sz="1350" b="1">
                 <a:solidFill>
                   <a:srgbClr val="FFFFFF"/>
                 </a:solidFill>
@@ -17975,7 +17975,7 @@
         <p:spPr>
           <a:xfrm>
             <a:off x="367200" y="2340000"/>
-            <a:ext cx="1373595" cy="465940"/>
+            <a:ext cx="1373595" cy="2102914"/>
           </a:xfrm>
           <a:prstGeom prst="rect">
             <a:avLst/>
@@ -18002,7 +18002,7 @@
               <a:buChar char="•"/>
             </a:pPr>
             <a:r>
-              <a:rPr sz="1150" b="0">
+              <a:rPr sz="1300" b="0">
                 <a:solidFill>
                   <a:srgbClr val="1F2A44"/>
                 </a:solidFill>
@@ -18028,7 +18028,7 @@
               <a:buChar char="•"/>
             </a:pPr>
             <a:r>
-              <a:rPr sz="1150" b="0">
+              <a:rPr sz="1300" b="0">
                 <a:solidFill>
                   <a:srgbClr val="1F2A44"/>
                 </a:solidFill>
@@ -18049,7 +18049,7 @@
         </p:nvSpPr>
         <p:spPr>
           <a:xfrm>
-            <a:off x="1812795" y="2302970"/>
+            <a:off x="1812795" y="3121457"/>
             <a:ext cx="140400" cy="216000"/>
           </a:xfrm>
           <a:prstGeom prst="rightArrow">
@@ -18094,7 +18094,7 @@
         <p:spPr>
           <a:xfrm>
             <a:off x="1981995" y="1998000"/>
-            <a:ext cx="1459995" cy="825940"/>
+            <a:ext cx="1459995" cy="2462914"/>
           </a:xfrm>
           <a:prstGeom prst="roundRect">
             <a:avLst>
@@ -18187,7 +18187,7 @@
               </a:spcAft>
             </a:pPr>
             <a:r>
-              <a:rPr sz="1207" b="1">
+              <a:rPr sz="1350" b="1">
                 <a:solidFill>
                   <a:srgbClr val="FFFFFF"/>
                 </a:solidFill>
@@ -18209,7 +18209,7 @@
         <p:spPr>
           <a:xfrm>
             <a:off x="2025195" y="2340000"/>
-            <a:ext cx="1373595" cy="465940"/>
+            <a:ext cx="1373595" cy="2102914"/>
           </a:xfrm>
           <a:prstGeom prst="rect">
             <a:avLst/>
@@ -18236,7 +18236,7 @@
               <a:buChar char="•"/>
             </a:pPr>
             <a:r>
-              <a:rPr sz="1150" b="0">
+              <a:rPr sz="1300" b="0">
                 <a:solidFill>
                   <a:srgbClr val="1F2A44"/>
                 </a:solidFill>
@@ -18262,7 +18262,7 @@
               <a:buChar char="•"/>
             </a:pPr>
             <a:r>
-              <a:rPr sz="1150" b="0">
+              <a:rPr sz="1300" b="0">
                 <a:solidFill>
                   <a:srgbClr val="1F2A44"/>
                 </a:solidFill>
@@ -18283,7 +18283,7 @@
         </p:nvSpPr>
         <p:spPr>
           <a:xfrm>
-            <a:off x="3470791" y="2302970"/>
+            <a:off x="3470791" y="3121457"/>
             <a:ext cx="140400" cy="216000"/>
           </a:xfrm>
           <a:prstGeom prst="rightArrow">
@@ -18328,7 +18328,7 @@
         <p:spPr>
           <a:xfrm>
             <a:off x="3639991" y="1998000"/>
-            <a:ext cx="1459995" cy="825940"/>
+            <a:ext cx="1459995" cy="2462914"/>
           </a:xfrm>
           <a:prstGeom prst="roundRect">
             <a:avLst>
@@ -18421,7 +18421,7 @@
               </a:spcAft>
             </a:pPr>
             <a:r>
-              <a:rPr sz="1207" b="1">
+              <a:rPr sz="1350" b="1">
                 <a:solidFill>
                   <a:srgbClr val="FFFFFF"/>
                 </a:solidFill>
@@ -18443,7 +18443,7 @@
         <p:spPr>
           <a:xfrm>
             <a:off x="3683191" y="2340000"/>
-            <a:ext cx="1373595" cy="465940"/>
+            <a:ext cx="1373595" cy="2102914"/>
           </a:xfrm>
           <a:prstGeom prst="rect">
             <a:avLst/>
@@ -18470,7 +18470,7 @@
               <a:buChar char="•"/>
             </a:pPr>
             <a:r>
-              <a:rPr sz="1150" b="0">
+              <a:rPr sz="1300" b="0">
                 <a:solidFill>
                   <a:srgbClr val="1F2A44"/>
                 </a:solidFill>
@@ -18496,7 +18496,7 @@
               <a:buChar char="•"/>
             </a:pPr>
             <a:r>
-              <a:rPr sz="1150" b="0">
+              <a:rPr sz="1300" b="0">
                 <a:solidFill>
                   <a:srgbClr val="1F2A44"/>
                 </a:solidFill>
@@ -18517,7 +18517,7 @@
         </p:nvSpPr>
         <p:spPr>
           <a:xfrm>
-            <a:off x="5128786" y="2302970"/>
+            <a:off x="5128786" y="3121457"/>
             <a:ext cx="140400" cy="216000"/>
           </a:xfrm>
           <a:prstGeom prst="rightArrow">
@@ -18562,7 +18562,7 @@
         <p:spPr>
           <a:xfrm>
             <a:off x="5297986" y="1998000"/>
-            <a:ext cx="1459995" cy="825940"/>
+            <a:ext cx="1459995" cy="2462914"/>
           </a:xfrm>
           <a:prstGeom prst="roundRect">
             <a:avLst>
@@ -18655,7 +18655,7 @@
               </a:spcAft>
             </a:pPr>
             <a:r>
-              <a:rPr sz="1207" b="1">
+              <a:rPr sz="1350" b="1">
                 <a:solidFill>
                   <a:srgbClr val="FFFFFF"/>
                 </a:solidFill>
@@ -18677,7 +18677,7 @@
         <p:spPr>
           <a:xfrm>
             <a:off x="5341186" y="2340000"/>
-            <a:ext cx="1373595" cy="465940"/>
+            <a:ext cx="1373595" cy="2102914"/>
           </a:xfrm>
           <a:prstGeom prst="rect">
             <a:avLst/>
@@ -18704,7 +18704,7 @@
               <a:buChar char="•"/>
             </a:pPr>
             <a:r>
-              <a:rPr sz="1150" b="0">
+              <a:rPr sz="1300" b="0">
                 <a:solidFill>
                   <a:srgbClr val="1F2A44"/>
                 </a:solidFill>
@@ -18730,7 +18730,7 @@
               <a:buChar char="•"/>
             </a:pPr>
             <a:r>
-              <a:rPr sz="1150" b="0">
+              <a:rPr sz="1300" b="0">
                 <a:solidFill>
                   <a:srgbClr val="1F2A44"/>
                 </a:solidFill>
@@ -18751,8 +18751,8 @@
         </p:nvSpPr>
         <p:spPr>
           <a:xfrm>
-            <a:off x="324000" y="2931940"/>
-            <a:ext cx="6433982" cy="3548059"/>
+            <a:off x="324000" y="4568914"/>
+            <a:ext cx="6433982" cy="1911085"/>
           </a:xfrm>
           <a:prstGeom prst="rect">
             <a:avLst/>
@@ -18760,7 +18760,7 @@
           <a:noFill/>
         </p:spPr>
         <p:txBody>
-          <a:bodyPr wrap="square" anchor="t" lIns="43200" rIns="43200" tIns="43200" bIns="43200">
+          <a:bodyPr wrap="square" anchor="ctr" lIns="43200" rIns="43200" tIns="43200" bIns="43200">
             <a:noAutofit/>
           </a:bodyPr>
           <a:lstStyle/>
@@ -18770,7 +18770,7 @@
                 <a:spcPct val="120000"/>
               </a:lnSpc>
               <a:spcBef>
-                <a:spcPts val="1700"/>
+                <a:spcPts val="2700"/>
               </a:spcBef>
               <a:spcAft>
                 <a:spcPts val="0"/>
@@ -18779,7 +18779,7 @@
               <a:buChar char="•"/>
             </a:pPr>
             <a:r>
-              <a:rPr sz="1437" b="0">
+              <a:rPr sz="1450" b="0">
                 <a:solidFill>
                   <a:srgbClr val="1F2A44"/>
                 </a:solidFill>
@@ -18913,7 +18913,7 @@
         </p:nvGraphicFramePr>
         <p:xfrm>
           <a:off x="7009982" y="1998000"/>
-          <a:ext cx="4769217" cy="1587715"/>
+          <a:ext cx="4769217" cy="4410000"/>
         </p:xfrm>
         <a:graphic>
           <a:graphicData uri="http://schemas.openxmlformats.org/drawingml/2006/table">
@@ -18923,7 +18923,7 @@
                 <a:gridCol w="2649565"/>
                 <a:gridCol w="2119652"/>
               </a:tblGrid>
-              <a:tr h="317543">
+              <a:tr h="882000">
                 <a:tc>
                   <a:txBody>
                     <a:bodyPr wrap="square"/>
@@ -19035,7 +19035,7 @@
                   </a:tcPr>
                 </a:tc>
               </a:tr>
-              <a:tr h="317543">
+              <a:tr h="882000">
                 <a:tc>
                   <a:txBody>
                     <a:bodyPr wrap="square"/>
@@ -19147,7 +19147,7 @@
                   </a:tcPr>
                 </a:tc>
               </a:tr>
-              <a:tr h="317543">
+              <a:tr h="882000">
                 <a:tc>
                   <a:txBody>
                     <a:bodyPr wrap="square"/>
@@ -19259,7 +19259,7 @@
                   </a:tcPr>
                 </a:tc>
               </a:tr>
-              <a:tr h="317543">
+              <a:tr h="882000">
                 <a:tc>
                   <a:txBody>
                     <a:bodyPr wrap="square"/>
@@ -19371,7 +19371,7 @@
                   </a:tcPr>
                 </a:tc>
               </a:tr>
-              <a:tr h="317543">
+              <a:tr h="882000">
                 <a:tc>
                   <a:txBody>
                     <a:bodyPr wrap="square"/>
@@ -25893,7 +25893,7 @@
           <a:noFill/>
         </p:spPr>
         <p:txBody>
-          <a:bodyPr wrap="square" anchor="t" lIns="43200" rIns="43200" tIns="43200" bIns="43200">
+          <a:bodyPr wrap="square" anchor="ctr" lIns="43200" rIns="43200" tIns="43200" bIns="43200">
             <a:noAutofit/>
           </a:bodyPr>
           <a:lstStyle/>
@@ -25903,7 +25903,7 @@
                 <a:spcPct val="120000"/>
               </a:lnSpc>
               <a:spcBef>
-                <a:spcPts val="1700"/>
+                <a:spcPts val="2700"/>
               </a:spcBef>
               <a:spcAft>
                 <a:spcPts val="0"/>
@@ -25912,7 +25912,7 @@
               <a:buChar char="•"/>
             </a:pPr>
             <a:r>
-              <a:rPr sz="1437" b="0">
+              <a:rPr sz="1450" b="0">
                 <a:solidFill>
                   <a:srgbClr val="1F2A44"/>
                 </a:solidFill>
@@ -25929,7 +25929,7 @@
                 <a:spcPct val="120000"/>
               </a:lnSpc>
               <a:spcBef>
-                <a:spcPts val="1700"/>
+                <a:spcPts val="2700"/>
               </a:spcBef>
               <a:spcAft>
                 <a:spcPts val="0"/>
@@ -25938,7 +25938,7 @@
               <a:buChar char="•"/>
             </a:pPr>
             <a:r>
-              <a:rPr sz="1437" b="0">
+              <a:rPr sz="1450" b="0">
                 <a:solidFill>
                   <a:srgbClr val="1F2A44"/>
                 </a:solidFill>
@@ -25955,7 +25955,7 @@
                 <a:spcPct val="120000"/>
               </a:lnSpc>
               <a:spcBef>
-                <a:spcPts val="1700"/>
+                <a:spcPts val="2700"/>
               </a:spcBef>
               <a:spcAft>
                 <a:spcPts val="0"/>
@@ -25964,7 +25964,7 @@
               <a:buChar char="•"/>
             </a:pPr>
             <a:r>
-              <a:rPr sz="1437" b="0">
+              <a:rPr sz="1450" b="0">
                 <a:solidFill>
                   <a:srgbClr val="1F2A44"/>
                 </a:solidFill>
@@ -25981,7 +25981,7 @@
                 <a:spcPct val="120000"/>
               </a:lnSpc>
               <a:spcBef>
-                <a:spcPts val="1700"/>
+                <a:spcPts val="2700"/>
               </a:spcBef>
               <a:spcAft>
                 <a:spcPts val="0"/>
@@ -25990,7 +25990,7 @@
               <a:buChar char="•"/>
             </a:pPr>
             <a:r>
-              <a:rPr sz="1437" b="0">
+              <a:rPr sz="1450" b="0">
                 <a:solidFill>
                   <a:srgbClr val="1F2A44"/>
                 </a:solidFill>
@@ -26092,7 +26092,7 @@
         <p:spPr>
           <a:xfrm>
             <a:off x="6177600" y="1998000"/>
-            <a:ext cx="1274400" cy="620201"/>
+            <a:ext cx="1274400" cy="2069796"/>
           </a:xfrm>
           <a:prstGeom prst="roundRect">
             <a:avLst>
@@ -26185,7 +26185,7 @@
               </a:spcAft>
             </a:pPr>
             <a:r>
-              <a:rPr sz="1150" b="1">
+              <a:rPr sz="1285" b="1">
                 <a:solidFill>
                   <a:srgbClr val="FFFFFF"/>
                 </a:solidFill>
@@ -26207,7 +26207,7 @@
         <p:spPr>
           <a:xfrm>
             <a:off x="6220800" y="2340000"/>
-            <a:ext cx="1188000" cy="260201"/>
+            <a:ext cx="1188000" cy="1709796"/>
           </a:xfrm>
           <a:prstGeom prst="rect">
             <a:avLst/>
@@ -26232,7 +26232,7 @@
               </a:spcAft>
             </a:pPr>
             <a:r>
-              <a:rPr sz="1092" b="0">
+              <a:rPr sz="1420" b="0">
                 <a:solidFill>
                   <a:srgbClr val="1F2A44"/>
                 </a:solidFill>
@@ -26253,7 +26253,7 @@
         </p:nvSpPr>
         <p:spPr>
           <a:xfrm>
-            <a:off x="7480799" y="2200100"/>
+            <a:off x="7480799" y="2924898"/>
             <a:ext cx="140400" cy="216000"/>
           </a:xfrm>
           <a:prstGeom prst="rightArrow">
@@ -26298,7 +26298,7 @@
         <p:spPr>
           <a:xfrm>
             <a:off x="7650000" y="1998000"/>
-            <a:ext cx="1274400" cy="620201"/>
+            <a:ext cx="1274400" cy="2069796"/>
           </a:xfrm>
           <a:prstGeom prst="roundRect">
             <a:avLst>
@@ -26391,7 +26391,7 @@
               </a:spcAft>
             </a:pPr>
             <a:r>
-              <a:rPr sz="1150" b="1">
+              <a:rPr sz="1285" b="1">
                 <a:solidFill>
                   <a:srgbClr val="FFFFFF"/>
                 </a:solidFill>
@@ -26413,7 +26413,7 @@
         <p:spPr>
           <a:xfrm>
             <a:off x="7693200" y="2340000"/>
-            <a:ext cx="1188000" cy="260201"/>
+            <a:ext cx="1188000" cy="1709796"/>
           </a:xfrm>
           <a:prstGeom prst="rect">
             <a:avLst/>
@@ -26438,7 +26438,7 @@
               </a:spcAft>
             </a:pPr>
             <a:r>
-              <a:rPr sz="1092" b="0">
+              <a:rPr sz="1420" b="0">
                 <a:solidFill>
                   <a:srgbClr val="1F2A44"/>
                 </a:solidFill>
@@ -26459,7 +26459,7 @@
         </p:nvSpPr>
         <p:spPr>
           <a:xfrm>
-            <a:off x="8953200" y="2200100"/>
+            <a:off x="8953200" y="2924898"/>
             <a:ext cx="140400" cy="216000"/>
           </a:xfrm>
           <a:prstGeom prst="rightArrow">
@@ -26504,7 +26504,7 @@
         <p:spPr>
           <a:xfrm>
             <a:off x="9122400" y="1998000"/>
-            <a:ext cx="1274400" cy="620201"/>
+            <a:ext cx="1274400" cy="2069796"/>
           </a:xfrm>
           <a:prstGeom prst="roundRect">
             <a:avLst>
@@ -26597,7 +26597,7 @@
               </a:spcAft>
             </a:pPr>
             <a:r>
-              <a:rPr sz="1150" b="1">
+              <a:rPr sz="1285" b="1">
                 <a:solidFill>
                   <a:srgbClr val="FFFFFF"/>
                 </a:solidFill>
@@ -26619,7 +26619,7 @@
         <p:spPr>
           <a:xfrm>
             <a:off x="9165600" y="2340000"/>
-            <a:ext cx="1188000" cy="260201"/>
+            <a:ext cx="1188000" cy="1709796"/>
           </a:xfrm>
           <a:prstGeom prst="rect">
             <a:avLst/>
@@ -26644,7 +26644,7 @@
               </a:spcAft>
             </a:pPr>
             <a:r>
-              <a:rPr sz="1092" b="0">
+              <a:rPr sz="1420" b="0">
                 <a:solidFill>
                   <a:srgbClr val="1F2A44"/>
                 </a:solidFill>
@@ -26665,7 +26665,7 @@
         </p:nvSpPr>
         <p:spPr>
           <a:xfrm>
-            <a:off x="10425599" y="2200100"/>
+            <a:off x="10425599" y="2924898"/>
             <a:ext cx="140400" cy="216000"/>
           </a:xfrm>
           <a:prstGeom prst="rightArrow">
@@ -26710,7 +26710,7 @@
         <p:spPr>
           <a:xfrm>
             <a:off x="10594800" y="1998000"/>
-            <a:ext cx="1274400" cy="620201"/>
+            <a:ext cx="1274400" cy="2069796"/>
           </a:xfrm>
           <a:prstGeom prst="roundRect">
             <a:avLst>
@@ -26803,7 +26803,7 @@
               </a:spcAft>
             </a:pPr>
             <a:r>
-              <a:rPr sz="1150" b="1">
+              <a:rPr sz="1285" b="1">
                 <a:solidFill>
                   <a:srgbClr val="FFFFFF"/>
                 </a:solidFill>
@@ -26825,7 +26825,7 @@
         <p:spPr>
           <a:xfrm>
             <a:off x="10638000" y="2340000"/>
-            <a:ext cx="1188000" cy="260201"/>
+            <a:ext cx="1188000" cy="1709796"/>
           </a:xfrm>
           <a:prstGeom prst="rect">
             <a:avLst/>
@@ -26850,7 +26850,7 @@
               </a:spcAft>
             </a:pPr>
             <a:r>
-              <a:rPr sz="1092" b="0">
+              <a:rPr sz="1420" b="0">
                 <a:solidFill>
                   <a:srgbClr val="1F2A44"/>
                 </a:solidFill>
@@ -26872,8 +26872,8 @@
           <p:nvPr/>
         </p:nvGraphicFramePr>
         <p:xfrm>
-          <a:off x="6177600" y="2726201"/>
-          <a:ext cx="5691599" cy="1270172"/>
+          <a:off x="6177600" y="4175796"/>
+          <a:ext cx="5691599" cy="2304200"/>
         </p:xfrm>
         <a:graphic>
           <a:graphicData uri="http://schemas.openxmlformats.org/drawingml/2006/table">
@@ -26883,7 +26883,7 @@
                 <a:gridCol w="3478200"/>
                 <a:gridCol w="2213399"/>
               </a:tblGrid>
-              <a:tr h="317543">
+              <a:tr h="576050">
                 <a:tc>
                   <a:txBody>
                     <a:bodyPr wrap="square"/>
@@ -26995,7 +26995,7 @@
                   </a:tcPr>
                 </a:tc>
               </a:tr>
-              <a:tr h="317543">
+              <a:tr h="576050">
                 <a:tc>
                   <a:txBody>
                     <a:bodyPr wrap="square"/>
@@ -27107,7 +27107,7 @@
                   </a:tcPr>
                 </a:tc>
               </a:tr>
-              <a:tr h="317543">
+              <a:tr h="576050">
                 <a:tc>
                   <a:txBody>
                     <a:bodyPr wrap="square"/>
@@ -27219,7 +27219,7 @@
                   </a:tcPr>
                 </a:tc>
               </a:tr>
-              <a:tr h="317543">
+              <a:tr h="576050">
                 <a:tc>
                   <a:txBody>
                     <a:bodyPr wrap="square"/>
@@ -28839,7 +28839,7 @@
         </p:nvGraphicFramePr>
         <p:xfrm>
           <a:off x="324000" y="2808000"/>
-          <a:ext cx="11545198" cy="1306708"/>
+          <a:ext cx="11545198" cy="1916740"/>
         </p:xfrm>
         <a:graphic>
           <a:graphicData uri="http://schemas.openxmlformats.org/drawingml/2006/table">
@@ -28850,7 +28850,7 @@
                 <a:gridCol w="6297381"/>
                 <a:gridCol w="2728865"/>
               </a:tblGrid>
-              <a:tr h="326677">
+              <a:tr h="479185">
                 <a:tc>
                   <a:txBody>
                     <a:bodyPr wrap="square"/>
@@ -29017,7 +29017,7 @@
                   </a:tcPr>
                 </a:tc>
               </a:tr>
-              <a:tr h="326677">
+              <a:tr h="479185">
                 <a:tc>
                   <a:txBody>
                     <a:bodyPr wrap="square"/>
@@ -29184,7 +29184,7 @@
                   </a:tcPr>
                 </a:tc>
               </a:tr>
-              <a:tr h="326677">
+              <a:tr h="479185">
                 <a:tc>
                   <a:txBody>
                     <a:bodyPr wrap="square"/>
@@ -29351,7 +29351,7 @@
                   </a:tcPr>
                 </a:tc>
               </a:tr>
-              <a:tr h="326677">
+              <a:tr h="479185">
                 <a:tc>
                   <a:txBody>
                     <a:bodyPr wrap="square"/>
@@ -29530,8 +29530,8 @@
         </p:nvSpPr>
         <p:spPr>
           <a:xfrm>
-            <a:off x="324000" y="4222710"/>
-            <a:ext cx="3788400" cy="2257290"/>
+            <a:off x="324000" y="4832740"/>
+            <a:ext cx="3788400" cy="1647259"/>
           </a:xfrm>
           <a:prstGeom prst="roundRect">
             <a:avLst>
@@ -29578,7 +29578,7 @@
         </p:nvSpPr>
         <p:spPr>
           <a:xfrm>
-            <a:off x="396000" y="4265909"/>
+            <a:off x="396000" y="4875940"/>
             <a:ext cx="3644400" cy="251999"/>
           </a:xfrm>
           <a:prstGeom prst="rect">
@@ -29593,7 +29593,7 @@
           <a:lstStyle/>
           <a:p>
             <a:r>
-              <a:rPr sz="1450" b="1">
+              <a:rPr sz="1550" b="1">
                 <a:solidFill>
                   <a:srgbClr val="1F5FD1"/>
                 </a:solidFill>
@@ -29614,7 +29614,7 @@
         </p:nvSpPr>
         <p:spPr>
           <a:xfrm>
-            <a:off x="396000" y="4517910"/>
+            <a:off x="396000" y="5127940"/>
             <a:ext cx="3644400" cy="7200"/>
           </a:xfrm>
           <a:prstGeom prst="rect">
@@ -29658,8 +29658,8 @@
         </p:nvSpPr>
         <p:spPr>
           <a:xfrm>
-            <a:off x="378000" y="4546710"/>
-            <a:ext cx="3680400" cy="1897290"/>
+            <a:off x="378000" y="5156740"/>
+            <a:ext cx="3680400" cy="1287259"/>
           </a:xfrm>
           <a:prstGeom prst="rect">
             <a:avLst/>
@@ -29667,7 +29667,7 @@
           <a:noFill/>
         </p:spPr>
         <p:txBody>
-          <a:bodyPr wrap="square" anchor="t" lIns="28800" rIns="28800" tIns="28800" bIns="28800">
+          <a:bodyPr wrap="square" anchor="ctr" lIns="28800" rIns="28800" tIns="28800" bIns="28800">
             <a:noAutofit/>
           </a:bodyPr>
           <a:lstStyle/>
@@ -29680,13 +29680,13 @@
                 <a:spcPts val="0"/>
               </a:spcBef>
               <a:spcAft>
-                <a:spcPts val="1000"/>
+                <a:spcPts val="1257"/>
               </a:spcAft>
               <a:buFont typeface="Segoe UI Symbol"/>
               <a:buChar char="✓"/>
             </a:pPr>
             <a:r>
-              <a:rPr sz="1350" b="0">
+              <a:rPr sz="1450" b="0">
                 <a:solidFill>
                   <a:srgbClr val="1F2A44"/>
                 </a:solidFill>
@@ -29706,13 +29706,13 @@
                 <a:spcPts val="0"/>
               </a:spcBef>
               <a:spcAft>
-                <a:spcPts val="1000"/>
+                <a:spcPts val="1257"/>
               </a:spcAft>
               <a:buFont typeface="Segoe UI Symbol"/>
               <a:buChar char="✓"/>
             </a:pPr>
             <a:r>
-              <a:rPr sz="1350" b="0">
+              <a:rPr sz="1450" b="0">
                 <a:solidFill>
                   <a:srgbClr val="1F2A44"/>
                 </a:solidFill>
@@ -29733,8 +29733,8 @@
         </p:nvSpPr>
         <p:spPr>
           <a:xfrm>
-            <a:off x="4202400" y="4222710"/>
-            <a:ext cx="3788400" cy="2257290"/>
+            <a:off x="4202400" y="4832740"/>
+            <a:ext cx="3788400" cy="1647259"/>
           </a:xfrm>
           <a:prstGeom prst="roundRect">
             <a:avLst>
@@ -29781,7 +29781,7 @@
         </p:nvSpPr>
         <p:spPr>
           <a:xfrm>
-            <a:off x="4274400" y="4265909"/>
+            <a:off x="4274400" y="4875940"/>
             <a:ext cx="3644400" cy="251999"/>
           </a:xfrm>
           <a:prstGeom prst="rect">
@@ -29796,7 +29796,7 @@
           <a:lstStyle/>
           <a:p>
             <a:r>
-              <a:rPr sz="1450" b="1">
+              <a:rPr sz="1550" b="1">
                 <a:solidFill>
                   <a:srgbClr val="1F5FD1"/>
                 </a:solidFill>
@@ -29817,7 +29817,7 @@
         </p:nvSpPr>
         <p:spPr>
           <a:xfrm>
-            <a:off x="4274400" y="4517910"/>
+            <a:off x="4274400" y="5127940"/>
             <a:ext cx="3644400" cy="7200"/>
           </a:xfrm>
           <a:prstGeom prst="rect">
@@ -29861,8 +29861,8 @@
         </p:nvSpPr>
         <p:spPr>
           <a:xfrm>
-            <a:off x="4256400" y="4546710"/>
-            <a:ext cx="3680400" cy="1897290"/>
+            <a:off x="4256400" y="5156740"/>
+            <a:ext cx="3680400" cy="1287259"/>
           </a:xfrm>
           <a:prstGeom prst="rect">
             <a:avLst/>
@@ -29870,7 +29870,7 @@
           <a:noFill/>
         </p:spPr>
         <p:txBody>
-          <a:bodyPr wrap="square" anchor="t" lIns="28800" rIns="28800" tIns="28800" bIns="28800">
+          <a:bodyPr wrap="square" anchor="ctr" lIns="28800" rIns="28800" tIns="28800" bIns="28800">
             <a:noAutofit/>
           </a:bodyPr>
           <a:lstStyle/>
@@ -29883,13 +29883,13 @@
                 <a:spcPts val="0"/>
               </a:spcBef>
               <a:spcAft>
-                <a:spcPts val="1000"/>
+                <a:spcPts val="1257"/>
               </a:spcAft>
               <a:buFont typeface="Segoe UI Symbol"/>
               <a:buChar char="✓"/>
             </a:pPr>
             <a:r>
-              <a:rPr sz="1350" b="0">
+              <a:rPr sz="1450" b="0">
                 <a:solidFill>
                   <a:srgbClr val="1F2A44"/>
                 </a:solidFill>
@@ -29909,13 +29909,13 @@
                 <a:spcPts val="0"/>
               </a:spcBef>
               <a:spcAft>
-                <a:spcPts val="1000"/>
+                <a:spcPts val="1257"/>
               </a:spcAft>
               <a:buFont typeface="Segoe UI Symbol"/>
               <a:buChar char="✓"/>
             </a:pPr>
             <a:r>
-              <a:rPr sz="1350" b="0">
+              <a:rPr sz="1450" b="0">
                 <a:solidFill>
                   <a:srgbClr val="1F2A44"/>
                 </a:solidFill>
@@ -29936,8 +29936,8 @@
         </p:nvSpPr>
         <p:spPr>
           <a:xfrm>
-            <a:off x="8080800" y="4222710"/>
-            <a:ext cx="3788400" cy="2257290"/>
+            <a:off x="8080800" y="4832740"/>
+            <a:ext cx="3788400" cy="1647259"/>
           </a:xfrm>
           <a:prstGeom prst="roundRect">
             <a:avLst>
@@ -29984,7 +29984,7 @@
         </p:nvSpPr>
         <p:spPr>
           <a:xfrm>
-            <a:off x="8152799" y="4265909"/>
+            <a:off x="8152799" y="4875940"/>
             <a:ext cx="3644400" cy="251999"/>
           </a:xfrm>
           <a:prstGeom prst="rect">
@@ -29999,7 +29999,7 @@
           <a:lstStyle/>
           <a:p>
             <a:r>
-              <a:rPr sz="1450" b="1">
+              <a:rPr sz="1550" b="1">
                 <a:solidFill>
                   <a:srgbClr val="1F5FD1"/>
                 </a:solidFill>
@@ -30020,7 +30020,7 @@
         </p:nvSpPr>
         <p:spPr>
           <a:xfrm>
-            <a:off x="8152799" y="4517910"/>
+            <a:off x="8152799" y="5127940"/>
             <a:ext cx="3644400" cy="7200"/>
           </a:xfrm>
           <a:prstGeom prst="rect">
@@ -30064,8 +30064,8 @@
         </p:nvSpPr>
         <p:spPr>
           <a:xfrm>
-            <a:off x="8134799" y="4546710"/>
-            <a:ext cx="3680400" cy="1897290"/>
+            <a:off x="8134799" y="5156740"/>
+            <a:ext cx="3680400" cy="1287259"/>
           </a:xfrm>
           <a:prstGeom prst="rect">
             <a:avLst/>
@@ -30073,7 +30073,7 @@
           <a:noFill/>
         </p:spPr>
         <p:txBody>
-          <a:bodyPr wrap="square" anchor="t" lIns="28800" rIns="28800" tIns="28800" bIns="28800">
+          <a:bodyPr wrap="square" anchor="ctr" lIns="28800" rIns="28800" tIns="28800" bIns="28800">
             <a:noAutofit/>
           </a:bodyPr>
           <a:lstStyle/>
@@ -30086,13 +30086,13 @@
                 <a:spcPts val="0"/>
               </a:spcBef>
               <a:spcAft>
-                <a:spcPts val="1000"/>
+                <a:spcPts val="1257"/>
               </a:spcAft>
               <a:buFont typeface="Segoe UI Symbol"/>
               <a:buChar char="✓"/>
             </a:pPr>
             <a:r>
-              <a:rPr sz="1350" b="0">
+              <a:rPr sz="1450" b="0">
                 <a:solidFill>
                   <a:srgbClr val="1F2A44"/>
                 </a:solidFill>
@@ -30112,13 +30112,13 @@
                 <a:spcPts val="0"/>
               </a:spcBef>
               <a:spcAft>
-                <a:spcPts val="1000"/>
+                <a:spcPts val="1257"/>
               </a:spcAft>
               <a:buFont typeface="Segoe UI Symbol"/>
               <a:buChar char="✓"/>
             </a:pPr>
             <a:r>
-              <a:rPr sz="1350" b="0">
+              <a:rPr sz="1450" b="0">
                 <a:solidFill>
                   <a:srgbClr val="1F2A44"/>
                 </a:solidFill>
@@ -30837,7 +30837,7 @@
           <a:lstStyle/>
           <a:p>
             <a:r>
-              <a:rPr sz="1450" b="1">
+              <a:rPr sz="1550" b="1">
                 <a:solidFill>
                   <a:srgbClr val="1F5FD1"/>
                 </a:solidFill>
@@ -30911,7 +30911,7 @@
           <a:noFill/>
         </p:spPr>
         <p:txBody>
-          <a:bodyPr wrap="square" anchor="t" lIns="28800" rIns="28800" tIns="28800" bIns="28800">
+          <a:bodyPr wrap="square" anchor="ctr" lIns="28800" rIns="28800" tIns="28800" bIns="28800">
             <a:noAutofit/>
           </a:bodyPr>
           <a:lstStyle/>
@@ -30924,13 +30924,13 @@
                 <a:spcPts val="0"/>
               </a:spcBef>
               <a:spcAft>
-                <a:spcPts val="1000"/>
+                <a:spcPts val="1800"/>
               </a:spcAft>
               <a:buFont typeface="Segoe UI Symbol"/>
               <a:buChar char="✓"/>
             </a:pPr>
             <a:r>
-              <a:rPr sz="1350" b="0">
+              <a:rPr sz="1450" b="0">
                 <a:solidFill>
                   <a:srgbClr val="1F2A44"/>
                 </a:solidFill>
@@ -30950,13 +30950,13 @@
                 <a:spcPts val="0"/>
               </a:spcBef>
               <a:spcAft>
-                <a:spcPts val="1000"/>
+                <a:spcPts val="1800"/>
               </a:spcAft>
               <a:buFont typeface="Segoe UI Symbol"/>
               <a:buChar char="✓"/>
             </a:pPr>
             <a:r>
-              <a:rPr sz="1350" b="0">
+              <a:rPr sz="1450" b="0">
                 <a:solidFill>
                   <a:srgbClr val="1F2A44"/>
                 </a:solidFill>
@@ -31040,7 +31040,7 @@
           <a:lstStyle/>
           <a:p>
             <a:r>
-              <a:rPr sz="1450" b="1">
+              <a:rPr sz="1550" b="1">
                 <a:solidFill>
                   <a:srgbClr val="1F5FD1"/>
                 </a:solidFill>
@@ -31114,7 +31114,7 @@
           <a:noFill/>
         </p:spPr>
         <p:txBody>
-          <a:bodyPr wrap="square" anchor="t" lIns="28800" rIns="28800" tIns="28800" bIns="28800">
+          <a:bodyPr wrap="square" anchor="ctr" lIns="28800" rIns="28800" tIns="28800" bIns="28800">
             <a:noAutofit/>
           </a:bodyPr>
           <a:lstStyle/>
@@ -31127,13 +31127,13 @@
                 <a:spcPts val="0"/>
               </a:spcBef>
               <a:spcAft>
-                <a:spcPts val="1000"/>
+                <a:spcPts val="1800"/>
               </a:spcAft>
               <a:buFont typeface="Segoe UI Symbol"/>
               <a:buChar char="✓"/>
             </a:pPr>
             <a:r>
-              <a:rPr sz="1350" b="0">
+              <a:rPr sz="1450" b="0">
                 <a:solidFill>
                   <a:srgbClr val="1F2A44"/>
                 </a:solidFill>
@@ -31153,13 +31153,13 @@
                 <a:spcPts val="0"/>
               </a:spcBef>
               <a:spcAft>
-                <a:spcPts val="1000"/>
+                <a:spcPts val="1800"/>
               </a:spcAft>
               <a:buFont typeface="Segoe UI Symbol"/>
               <a:buChar char="✓"/>
             </a:pPr>
             <a:r>
-              <a:rPr sz="1350" b="0">
+              <a:rPr sz="1450" b="0">
                 <a:solidFill>
                   <a:srgbClr val="1F2A44"/>
                 </a:solidFill>
@@ -31243,7 +31243,7 @@
           <a:lstStyle/>
           <a:p>
             <a:r>
-              <a:rPr sz="1450" b="1">
+              <a:rPr sz="1550" b="1">
                 <a:solidFill>
                   <a:srgbClr val="1F5FD1"/>
                 </a:solidFill>
@@ -31317,7 +31317,7 @@
           <a:noFill/>
         </p:spPr>
         <p:txBody>
-          <a:bodyPr wrap="square" anchor="t" lIns="28800" rIns="28800" tIns="28800" bIns="28800">
+          <a:bodyPr wrap="square" anchor="ctr" lIns="28800" rIns="28800" tIns="28800" bIns="28800">
             <a:noAutofit/>
           </a:bodyPr>
           <a:lstStyle/>
@@ -31330,13 +31330,13 @@
                 <a:spcPts val="0"/>
               </a:spcBef>
               <a:spcAft>
-                <a:spcPts val="1000"/>
+                <a:spcPts val="1800"/>
               </a:spcAft>
               <a:buFont typeface="Segoe UI Symbol"/>
               <a:buChar char="✓"/>
             </a:pPr>
             <a:r>
-              <a:rPr sz="1350" b="0">
+              <a:rPr sz="1450" b="0">
                 <a:solidFill>
                   <a:srgbClr val="1F2A44"/>
                 </a:solidFill>
@@ -31356,13 +31356,13 @@
                 <a:spcPts val="0"/>
               </a:spcBef>
               <a:spcAft>
-                <a:spcPts val="1000"/>
+                <a:spcPts val="1800"/>
               </a:spcAft>
               <a:buFont typeface="Segoe UI Symbol"/>
               <a:buChar char="✓"/>
             </a:pPr>
             <a:r>
-              <a:rPr sz="1350" b="0">
+              <a:rPr sz="1450" b="0">
                 <a:solidFill>
                   <a:srgbClr val="1F2A44"/>
                 </a:solidFill>
@@ -31446,7 +31446,7 @@
           <a:lstStyle/>
           <a:p>
             <a:r>
-              <a:rPr sz="1450" b="1">
+              <a:rPr sz="1550" b="1">
                 <a:solidFill>
                   <a:srgbClr val="1F5FD1"/>
                 </a:solidFill>
@@ -31520,7 +31520,7 @@
           <a:noFill/>
         </p:spPr>
         <p:txBody>
-          <a:bodyPr wrap="square" anchor="t" lIns="28800" rIns="28800" tIns="28800" bIns="28800">
+          <a:bodyPr wrap="square" anchor="ctr" lIns="28800" rIns="28800" tIns="28800" bIns="28800">
             <a:noAutofit/>
           </a:bodyPr>
           <a:lstStyle/>
@@ -31533,13 +31533,13 @@
                 <a:spcPts val="0"/>
               </a:spcBef>
               <a:spcAft>
-                <a:spcPts val="1000"/>
+                <a:spcPts val="1800"/>
               </a:spcAft>
               <a:buFont typeface="Segoe UI Symbol"/>
               <a:buChar char="✓"/>
             </a:pPr>
             <a:r>
-              <a:rPr sz="1350" b="0">
+              <a:rPr sz="1450" b="0">
                 <a:solidFill>
                   <a:srgbClr val="1F2A44"/>
                 </a:solidFill>
@@ -31559,13 +31559,13 @@
                 <a:spcPts val="0"/>
               </a:spcBef>
               <a:spcAft>
-                <a:spcPts val="1000"/>
+                <a:spcPts val="1800"/>
               </a:spcAft>
               <a:buFont typeface="Segoe UI Symbol"/>
               <a:buChar char="✓"/>
             </a:pPr>
             <a:r>
-              <a:rPr sz="1350" b="0">
+              <a:rPr sz="1450" b="0">
                 <a:solidFill>
                   <a:srgbClr val="1F2A44"/>
                 </a:solidFill>
@@ -31649,7 +31649,7 @@
           <a:lstStyle/>
           <a:p>
             <a:r>
-              <a:rPr sz="1450" b="1">
+              <a:rPr sz="1550" b="1">
                 <a:solidFill>
                   <a:srgbClr val="1F5FD1"/>
                 </a:solidFill>
@@ -31723,7 +31723,7 @@
           <a:noFill/>
         </p:spPr>
         <p:txBody>
-          <a:bodyPr wrap="square" anchor="t" lIns="28800" rIns="28800" tIns="28800" bIns="28800">
+          <a:bodyPr wrap="square" anchor="ctr" lIns="28800" rIns="28800" tIns="28800" bIns="28800">
             <a:noAutofit/>
           </a:bodyPr>
           <a:lstStyle/>
@@ -31736,13 +31736,13 @@
                 <a:spcPts val="0"/>
               </a:spcBef>
               <a:spcAft>
-                <a:spcPts val="1000"/>
+                <a:spcPts val="1800"/>
               </a:spcAft>
               <a:buFont typeface="Segoe UI Symbol"/>
               <a:buChar char="✓"/>
             </a:pPr>
             <a:r>
-              <a:rPr sz="1350" b="0">
+              <a:rPr sz="1450" b="0">
                 <a:solidFill>
                   <a:srgbClr val="1F2A44"/>
                 </a:solidFill>
@@ -31762,13 +31762,13 @@
                 <a:spcPts val="0"/>
               </a:spcBef>
               <a:spcAft>
-                <a:spcPts val="1000"/>
+                <a:spcPts val="1800"/>
               </a:spcAft>
               <a:buFont typeface="Segoe UI Symbol"/>
               <a:buChar char="✓"/>
             </a:pPr>
             <a:r>
-              <a:rPr sz="1350" b="0">
+              <a:rPr sz="1450" b="0">
                 <a:solidFill>
                   <a:srgbClr val="1F2A44"/>
                 </a:solidFill>
@@ -31852,7 +31852,7 @@
           <a:lstStyle/>
           <a:p>
             <a:r>
-              <a:rPr sz="1450" b="1">
+              <a:rPr sz="1550" b="1">
                 <a:solidFill>
                   <a:srgbClr val="1F5FD1"/>
                 </a:solidFill>
@@ -31926,7 +31926,7 @@
           <a:noFill/>
         </p:spPr>
         <p:txBody>
-          <a:bodyPr wrap="square" anchor="t" lIns="28800" rIns="28800" tIns="28800" bIns="28800">
+          <a:bodyPr wrap="square" anchor="ctr" lIns="28800" rIns="28800" tIns="28800" bIns="28800">
             <a:noAutofit/>
           </a:bodyPr>
           <a:lstStyle/>
@@ -31939,13 +31939,13 @@
                 <a:spcPts val="0"/>
               </a:spcBef>
               <a:spcAft>
-                <a:spcPts val="1000"/>
+                <a:spcPts val="1800"/>
               </a:spcAft>
               <a:buFont typeface="Segoe UI Symbol"/>
               <a:buChar char="✓"/>
             </a:pPr>
             <a:r>
-              <a:rPr sz="1350" b="0">
+              <a:rPr sz="1450" b="0">
                 <a:solidFill>
                   <a:srgbClr val="1F2A44"/>
                 </a:solidFill>
@@ -31965,13 +31965,13 @@
                 <a:spcPts val="0"/>
               </a:spcBef>
               <a:spcAft>
-                <a:spcPts val="1000"/>
+                <a:spcPts val="1800"/>
               </a:spcAft>
               <a:buFont typeface="Segoe UI Symbol"/>
               <a:buChar char="✓"/>
             </a:pPr>
             <a:r>
-              <a:rPr sz="1350" b="0">
+              <a:rPr sz="1450" b="0">
                 <a:solidFill>
                   <a:srgbClr val="1F2A44"/>
                 </a:solidFill>
@@ -36063,7 +36063,7 @@
           <a:noFill/>
         </p:spPr>
         <p:txBody>
-          <a:bodyPr wrap="square" anchor="t" lIns="43200" rIns="43200" tIns="43200" bIns="43200">
+          <a:bodyPr wrap="square" anchor="ctr" lIns="43200" rIns="43200" tIns="43200" bIns="43200">
             <a:noAutofit/>
           </a:bodyPr>
           <a:lstStyle/>
@@ -36073,7 +36073,7 @@
                 <a:spcPct val="120000"/>
               </a:lnSpc>
               <a:spcBef>
-                <a:spcPts val="1700"/>
+                <a:spcPts val="2700"/>
               </a:spcBef>
               <a:spcAft>
                 <a:spcPts val="0"/>
@@ -36082,7 +36082,7 @@
               <a:buChar char="•"/>
             </a:pPr>
             <a:r>
-              <a:rPr sz="1437" b="0">
+              <a:rPr sz="1450" b="0">
                 <a:solidFill>
                   <a:srgbClr val="1F2A44"/>
                 </a:solidFill>
@@ -36099,7 +36099,7 @@
                 <a:spcPct val="120000"/>
               </a:lnSpc>
               <a:spcBef>
-                <a:spcPts val="1700"/>
+                <a:spcPts val="2700"/>
               </a:spcBef>
               <a:spcAft>
                 <a:spcPts val="0"/>
@@ -36108,7 +36108,7 @@
               <a:buChar char="•"/>
             </a:pPr>
             <a:r>
-              <a:rPr sz="1437" b="0">
+              <a:rPr sz="1450" b="0">
                 <a:solidFill>
                   <a:srgbClr val="1F2A44"/>
                 </a:solidFill>
@@ -36125,7 +36125,7 @@
                 <a:spcPct val="120000"/>
               </a:lnSpc>
               <a:spcBef>
-                <a:spcPts val="1700"/>
+                <a:spcPts val="2700"/>
               </a:spcBef>
               <a:spcAft>
                 <a:spcPts val="0"/>
@@ -36134,7 +36134,7 @@
               <a:buChar char="•"/>
             </a:pPr>
             <a:r>
-              <a:rPr sz="1437" b="0">
+              <a:rPr sz="1450" b="0">
                 <a:solidFill>
                   <a:srgbClr val="1F2A44"/>
                 </a:solidFill>
@@ -36151,7 +36151,7 @@
                 <a:spcPct val="120000"/>
               </a:lnSpc>
               <a:spcBef>
-                <a:spcPts val="1700"/>
+                <a:spcPts val="2700"/>
               </a:spcBef>
               <a:spcAft>
                 <a:spcPts val="0"/>
@@ -36160,7 +36160,7 @@
               <a:buChar char="•"/>
             </a:pPr>
             <a:r>
-              <a:rPr sz="1437" b="0">
+              <a:rPr sz="1450" b="0">
                 <a:solidFill>
                   <a:srgbClr val="1F2A44"/>
                 </a:solidFill>
@@ -40542,7 +40542,7 @@
           <a:lstStyle/>
           <a:p>
             <a:r>
-              <a:rPr sz="1450" b="1">
+              <a:rPr sz="1550" b="1">
                 <a:solidFill>
                   <a:srgbClr val="1F5FD1"/>
                 </a:solidFill>
@@ -40616,7 +40616,7 @@
           <a:noFill/>
         </p:spPr>
         <p:txBody>
-          <a:bodyPr wrap="square" anchor="t" lIns="28800" rIns="28800" tIns="28800" bIns="28800">
+          <a:bodyPr wrap="square" anchor="ctr" lIns="28800" rIns="28800" tIns="28800" bIns="28800">
             <a:noAutofit/>
           </a:bodyPr>
           <a:lstStyle/>
@@ -40629,13 +40629,13 @@
                 <a:spcPts val="0"/>
               </a:spcBef>
               <a:spcAft>
-                <a:spcPts val="1000"/>
+                <a:spcPts val="1800"/>
               </a:spcAft>
               <a:buFont typeface="Segoe UI Symbol"/>
               <a:buChar char="✓"/>
             </a:pPr>
             <a:r>
-              <a:rPr sz="1350" b="0">
+              <a:rPr sz="1450" b="0">
                 <a:solidFill>
                   <a:srgbClr val="1F2A44"/>
                 </a:solidFill>
@@ -40655,13 +40655,13 @@
                 <a:spcPts val="0"/>
               </a:spcBef>
               <a:spcAft>
-                <a:spcPts val="1000"/>
+                <a:spcPts val="1800"/>
               </a:spcAft>
               <a:buFont typeface="Segoe UI Symbol"/>
               <a:buChar char="✓"/>
             </a:pPr>
             <a:r>
-              <a:rPr sz="1350" b="0">
+              <a:rPr sz="1450" b="0">
                 <a:solidFill>
                   <a:srgbClr val="1F2A44"/>
                 </a:solidFill>
@@ -40681,13 +40681,13 @@
                 <a:spcPts val="0"/>
               </a:spcBef>
               <a:spcAft>
-                <a:spcPts val="1000"/>
+                <a:spcPts val="1800"/>
               </a:spcAft>
               <a:buFont typeface="Segoe UI Symbol"/>
               <a:buChar char="✓"/>
             </a:pPr>
             <a:r>
-              <a:rPr sz="1350" b="0">
+              <a:rPr sz="1450" b="0">
                 <a:solidFill>
                   <a:srgbClr val="1F2A44"/>
                 </a:solidFill>
@@ -40707,13 +40707,13 @@
                 <a:spcPts val="0"/>
               </a:spcBef>
               <a:spcAft>
-                <a:spcPts val="1000"/>
+                <a:spcPts val="1800"/>
               </a:spcAft>
               <a:buFont typeface="Segoe UI Symbol"/>
               <a:buChar char="✓"/>
             </a:pPr>
             <a:r>
-              <a:rPr sz="1350" b="0">
+              <a:rPr sz="1450" b="0">
                 <a:solidFill>
                   <a:srgbClr val="1F2A44"/>
                 </a:solidFill>
@@ -40797,7 +40797,7 @@
           <a:lstStyle/>
           <a:p>
             <a:r>
-              <a:rPr sz="1450" b="1">
+              <a:rPr sz="1550" b="1">
                 <a:solidFill>
                   <a:srgbClr val="1F5FD1"/>
                 </a:solidFill>
@@ -40871,7 +40871,7 @@
           <a:noFill/>
         </p:spPr>
         <p:txBody>
-          <a:bodyPr wrap="square" anchor="t" lIns="28800" rIns="28800" tIns="28800" bIns="28800">
+          <a:bodyPr wrap="square" anchor="ctr" lIns="28800" rIns="28800" tIns="28800" bIns="28800">
             <a:noAutofit/>
           </a:bodyPr>
           <a:lstStyle/>
@@ -40884,13 +40884,13 @@
                 <a:spcPts val="0"/>
               </a:spcBef>
               <a:spcAft>
-                <a:spcPts val="1000"/>
+                <a:spcPts val="1800"/>
               </a:spcAft>
               <a:buFont typeface="Segoe UI Symbol"/>
               <a:buChar char="✓"/>
             </a:pPr>
             <a:r>
-              <a:rPr sz="1350" b="0">
+              <a:rPr sz="1450" b="0">
                 <a:solidFill>
                   <a:srgbClr val="1F2A44"/>
                 </a:solidFill>
@@ -40910,13 +40910,13 @@
                 <a:spcPts val="0"/>
               </a:spcBef>
               <a:spcAft>
-                <a:spcPts val="1000"/>
+                <a:spcPts val="1800"/>
               </a:spcAft>
               <a:buFont typeface="Segoe UI Symbol"/>
               <a:buChar char="✓"/>
             </a:pPr>
             <a:r>
-              <a:rPr sz="1350" b="0">
+              <a:rPr sz="1450" b="0">
                 <a:solidFill>
                   <a:srgbClr val="1F2A44"/>
                 </a:solidFill>
@@ -40936,13 +40936,13 @@
                 <a:spcPts val="0"/>
               </a:spcBef>
               <a:spcAft>
-                <a:spcPts val="1000"/>
+                <a:spcPts val="1800"/>
               </a:spcAft>
               <a:buFont typeface="Segoe UI Symbol"/>
               <a:buChar char="✓"/>
             </a:pPr>
             <a:r>
-              <a:rPr sz="1350" b="0">
+              <a:rPr sz="1450" b="0">
                 <a:solidFill>
                   <a:srgbClr val="1F2A44"/>
                 </a:solidFill>
@@ -41026,7 +41026,7 @@
           <a:lstStyle/>
           <a:p>
             <a:r>
-              <a:rPr sz="1450" b="1">
+              <a:rPr sz="1550" b="1">
                 <a:solidFill>
                   <a:srgbClr val="1F5FD1"/>
                 </a:solidFill>
@@ -41100,7 +41100,7 @@
           <a:noFill/>
         </p:spPr>
         <p:txBody>
-          <a:bodyPr wrap="square" anchor="t" lIns="28800" rIns="28800" tIns="28800" bIns="28800">
+          <a:bodyPr wrap="square" anchor="ctr" lIns="28800" rIns="28800" tIns="28800" bIns="28800">
             <a:noAutofit/>
           </a:bodyPr>
           <a:lstStyle/>
@@ -41113,13 +41113,13 @@
                 <a:spcPts val="0"/>
               </a:spcBef>
               <a:spcAft>
-                <a:spcPts val="1000"/>
+                <a:spcPts val="1800"/>
               </a:spcAft>
               <a:buFont typeface="Segoe UI Symbol"/>
               <a:buChar char="✓"/>
             </a:pPr>
             <a:r>
-              <a:rPr sz="1350" b="0">
+              <a:rPr sz="1450" b="0">
                 <a:solidFill>
                   <a:srgbClr val="1F2A44"/>
                 </a:solidFill>
@@ -41139,13 +41139,13 @@
                 <a:spcPts val="0"/>
               </a:spcBef>
               <a:spcAft>
-                <a:spcPts val="1000"/>
+                <a:spcPts val="1800"/>
               </a:spcAft>
               <a:buFont typeface="Segoe UI Symbol"/>
               <a:buChar char="✓"/>
             </a:pPr>
             <a:r>
-              <a:rPr sz="1350" b="0">
+              <a:rPr sz="1450" b="0">
                 <a:solidFill>
                   <a:srgbClr val="1F2A44"/>
                 </a:solidFill>
@@ -41165,13 +41165,13 @@
                 <a:spcPts val="0"/>
               </a:spcBef>
               <a:spcAft>
-                <a:spcPts val="1000"/>
+                <a:spcPts val="1800"/>
               </a:spcAft>
               <a:buFont typeface="Segoe UI Symbol"/>
               <a:buChar char="✓"/>
             </a:pPr>
             <a:r>
-              <a:rPr sz="1350" b="0">
+              <a:rPr sz="1450" b="0">
                 <a:solidFill>
                   <a:srgbClr val="1F2A44"/>
                 </a:solidFill>
@@ -41255,7 +41255,7 @@
           <a:lstStyle/>
           <a:p>
             <a:r>
-              <a:rPr sz="1450" b="1">
+              <a:rPr sz="1550" b="1">
                 <a:solidFill>
                   <a:srgbClr val="1F5FD1"/>
                 </a:solidFill>
@@ -41329,7 +41329,7 @@
           <a:noFill/>
         </p:spPr>
         <p:txBody>
-          <a:bodyPr wrap="square" anchor="t" lIns="28800" rIns="28800" tIns="28800" bIns="28800">
+          <a:bodyPr wrap="square" anchor="ctr" lIns="28800" rIns="28800" tIns="28800" bIns="28800">
             <a:noAutofit/>
           </a:bodyPr>
           <a:lstStyle/>
@@ -41342,13 +41342,13 @@
                 <a:spcPts val="0"/>
               </a:spcBef>
               <a:spcAft>
-                <a:spcPts val="1000"/>
+                <a:spcPts val="1800"/>
               </a:spcAft>
               <a:buFont typeface="Segoe UI Symbol"/>
               <a:buChar char="✓"/>
             </a:pPr>
             <a:r>
-              <a:rPr sz="1350" b="0">
+              <a:rPr sz="1450" b="0">
                 <a:solidFill>
                   <a:srgbClr val="1F2A44"/>
                 </a:solidFill>
@@ -41368,13 +41368,13 @@
                 <a:spcPts val="0"/>
               </a:spcBef>
               <a:spcAft>
-                <a:spcPts val="1000"/>
+                <a:spcPts val="1800"/>
               </a:spcAft>
               <a:buFont typeface="Segoe UI Symbol"/>
               <a:buChar char="✓"/>
             </a:pPr>
             <a:r>
-              <a:rPr sz="1350" b="0">
+              <a:rPr sz="1450" b="0">
                 <a:solidFill>
                   <a:srgbClr val="1F2A44"/>
                 </a:solidFill>
@@ -41394,13 +41394,13 @@
                 <a:spcPts val="0"/>
               </a:spcBef>
               <a:spcAft>
-                <a:spcPts val="1000"/>
+                <a:spcPts val="1800"/>
               </a:spcAft>
               <a:buFont typeface="Segoe UI Symbol"/>
               <a:buChar char="✓"/>
             </a:pPr>
             <a:r>
-              <a:rPr sz="1350" b="0">
+              <a:rPr sz="1450" b="0">
                 <a:solidFill>
                   <a:srgbClr val="1F2A44"/>
                 </a:solidFill>
@@ -44282,7 +44282,7 @@
           <a:noFill/>
         </p:spPr>
         <p:txBody>
-          <a:bodyPr wrap="square" anchor="t" lIns="43200" rIns="43200" tIns="43200" bIns="43200">
+          <a:bodyPr wrap="square" anchor="ctr" lIns="43200" rIns="43200" tIns="43200" bIns="43200">
             <a:noAutofit/>
           </a:bodyPr>
           <a:lstStyle/>
@@ -44292,7 +44292,7 @@
                 <a:spcPct val="120000"/>
               </a:lnSpc>
               <a:spcBef>
-                <a:spcPts val="1700"/>
+                <a:spcPts val="2700"/>
               </a:spcBef>
               <a:spcAft>
                 <a:spcPts val="0"/>
@@ -44301,7 +44301,7 @@
               <a:buChar char="•"/>
             </a:pPr>
             <a:r>
-              <a:rPr sz="1312" b="0">
+              <a:rPr sz="1500" b="0">
                 <a:solidFill>
                   <a:srgbClr val="1F2A44"/>
                 </a:solidFill>
@@ -44318,7 +44318,7 @@
                 <a:spcPct val="120000"/>
               </a:lnSpc>
               <a:spcBef>
-                <a:spcPts val="1700"/>
+                <a:spcPts val="2700"/>
               </a:spcBef>
               <a:spcAft>
                 <a:spcPts val="0"/>
@@ -44327,7 +44327,7 @@
               <a:buChar char="•"/>
             </a:pPr>
             <a:r>
-              <a:rPr sz="1312" b="0">
+              <a:rPr sz="1500" b="0">
                 <a:solidFill>
                   <a:srgbClr val="1F2A44"/>
                 </a:solidFill>
@@ -44344,7 +44344,7 @@
                 <a:spcPct val="120000"/>
               </a:lnSpc>
               <a:spcBef>
-                <a:spcPts val="1700"/>
+                <a:spcPts val="2700"/>
               </a:spcBef>
               <a:spcAft>
                 <a:spcPts val="0"/>
@@ -44353,7 +44353,7 @@
               <a:buChar char="•"/>
             </a:pPr>
             <a:r>
-              <a:rPr sz="1312" b="0">
+              <a:rPr sz="1500" b="0">
                 <a:solidFill>
                   <a:srgbClr val="1F2A44"/>
                 </a:solidFill>
@@ -44370,7 +44370,7 @@
                 <a:spcPct val="120000"/>
               </a:lnSpc>
               <a:spcBef>
-                <a:spcPts val="1700"/>
+                <a:spcPts val="2700"/>
               </a:spcBef>
               <a:spcAft>
                 <a:spcPts val="0"/>
@@ -44379,7 +44379,7 @@
               <a:buChar char="•"/>
             </a:pPr>
             <a:r>
-              <a:rPr sz="1312" b="0">
+              <a:rPr sz="1500" b="0">
                 <a:solidFill>
                   <a:srgbClr val="1F2A44"/>
                 </a:solidFill>
@@ -44557,7 +44557,7 @@
         </p:nvGraphicFramePr>
         <p:xfrm>
           <a:off x="4792000" y="1638000"/>
-          <a:ext cx="6987196" cy="1960062"/>
+          <a:ext cx="6987196" cy="2749110"/>
         </p:xfrm>
         <a:graphic>
           <a:graphicData uri="http://schemas.openxmlformats.org/drawingml/2006/table">
@@ -44570,7 +44570,7 @@
                 <a:gridCol w="1164533"/>
                 <a:gridCol w="931626"/>
               </a:tblGrid>
-              <a:tr h="326677">
+              <a:tr h="458185">
                 <a:tc>
                   <a:txBody>
                     <a:bodyPr wrap="square"/>
@@ -44847,7 +44847,7 @@
                   </a:tcPr>
                 </a:tc>
               </a:tr>
-              <a:tr h="326677">
+              <a:tr h="458185">
                 <a:tc>
                   <a:txBody>
                     <a:bodyPr wrap="square"/>
@@ -45124,7 +45124,7 @@
                   </a:tcPr>
                 </a:tc>
               </a:tr>
-              <a:tr h="326677">
+              <a:tr h="458185">
                 <a:tc>
                   <a:txBody>
                     <a:bodyPr wrap="square"/>
@@ -45401,7 +45401,7 @@
                   </a:tcPr>
                 </a:tc>
               </a:tr>
-              <a:tr h="326677">
+              <a:tr h="458185">
                 <a:tc>
                   <a:txBody>
                     <a:bodyPr wrap="square"/>
@@ -45678,7 +45678,7 @@
                   </a:tcPr>
                 </a:tc>
               </a:tr>
-              <a:tr h="326677">
+              <a:tr h="458185">
                 <a:tc>
                   <a:txBody>
                     <a:bodyPr wrap="square"/>
@@ -45955,7 +45955,7 @@
                   </a:tcPr>
                 </a:tc>
               </a:tr>
-              <a:tr h="326677">
+              <a:tr h="458185">
                 <a:tc>
                   <a:txBody>
                     <a:bodyPr wrap="square"/>
@@ -46244,8 +46244,8 @@
         </p:nvSpPr>
         <p:spPr>
           <a:xfrm>
-            <a:off x="4792000" y="3706065"/>
-            <a:ext cx="1598299" cy="804340"/>
+            <a:off x="4792000" y="4495111"/>
+            <a:ext cx="1598299" cy="1912888"/>
           </a:xfrm>
           <a:prstGeom prst="roundRect">
             <a:avLst>
@@ -46292,7 +46292,7 @@
         </p:nvSpPr>
         <p:spPr>
           <a:xfrm>
-            <a:off x="4792000" y="3706065"/>
+            <a:off x="4792000" y="4495111"/>
             <a:ext cx="1598299" cy="306000"/>
           </a:xfrm>
           <a:prstGeom prst="roundRect">
@@ -46338,7 +46338,7 @@
               </a:spcAft>
             </a:pPr>
             <a:r>
-              <a:rPr sz="1207" b="1">
+              <a:rPr sz="1350" b="1">
                 <a:solidFill>
                   <a:srgbClr val="FFFFFF"/>
                 </a:solidFill>
@@ -46359,8 +46359,8 @@
         </p:nvSpPr>
         <p:spPr>
           <a:xfrm>
-            <a:off x="4835199" y="4048064"/>
-            <a:ext cx="1511899" cy="444340"/>
+            <a:off x="4835199" y="4837111"/>
+            <a:ext cx="1511899" cy="1552888"/>
           </a:xfrm>
           <a:prstGeom prst="rect">
             <a:avLst/>
@@ -46385,7 +46385,7 @@
               </a:spcAft>
             </a:pPr>
             <a:r>
-              <a:rPr sz="1150" b="0">
+              <a:rPr sz="1300" b="0">
                 <a:solidFill>
                   <a:srgbClr val="1F2A44"/>
                 </a:solidFill>
@@ -46406,7 +46406,7 @@
         </p:nvSpPr>
         <p:spPr>
           <a:xfrm>
-            <a:off x="6419099" y="4000235"/>
+            <a:off x="6419099" y="5343555"/>
             <a:ext cx="140400" cy="216000"/>
           </a:xfrm>
           <a:prstGeom prst="rightArrow">
@@ -46450,8 +46450,8 @@
         </p:nvSpPr>
         <p:spPr>
           <a:xfrm>
-            <a:off x="6588299" y="3706065"/>
-            <a:ext cx="1598299" cy="804340"/>
+            <a:off x="6588299" y="4495111"/>
+            <a:ext cx="1598299" cy="1912888"/>
           </a:xfrm>
           <a:prstGeom prst="roundRect">
             <a:avLst>
@@ -46498,7 +46498,7 @@
         </p:nvSpPr>
         <p:spPr>
           <a:xfrm>
-            <a:off x="6588299" y="3706065"/>
+            <a:off x="6588299" y="4495111"/>
             <a:ext cx="1598299" cy="306000"/>
           </a:xfrm>
           <a:prstGeom prst="roundRect">
@@ -46544,7 +46544,7 @@
               </a:spcAft>
             </a:pPr>
             <a:r>
-              <a:rPr sz="1207" b="1">
+              <a:rPr sz="1350" b="1">
                 <a:solidFill>
                   <a:srgbClr val="FFFFFF"/>
                 </a:solidFill>
@@ -46565,8 +46565,8 @@
         </p:nvSpPr>
         <p:spPr>
           <a:xfrm>
-            <a:off x="6631499" y="4048064"/>
-            <a:ext cx="1511899" cy="444340"/>
+            <a:off x="6631499" y="4837111"/>
+            <a:ext cx="1511899" cy="1552888"/>
           </a:xfrm>
           <a:prstGeom prst="rect">
             <a:avLst/>
@@ -46591,7 +46591,7 @@
               </a:spcAft>
             </a:pPr>
             <a:r>
-              <a:rPr sz="1150" b="0">
+              <a:rPr sz="1300" b="0">
                 <a:solidFill>
                   <a:srgbClr val="1F2A44"/>
                 </a:solidFill>
@@ -46612,7 +46612,7 @@
         </p:nvSpPr>
         <p:spPr>
           <a:xfrm>
-            <a:off x="8215399" y="4000235"/>
+            <a:off x="8215399" y="5343555"/>
             <a:ext cx="140400" cy="216000"/>
           </a:xfrm>
           <a:prstGeom prst="rightArrow">
@@ -46656,8 +46656,8 @@
         </p:nvSpPr>
         <p:spPr>
           <a:xfrm>
-            <a:off x="8384599" y="3706065"/>
-            <a:ext cx="1598299" cy="804340"/>
+            <a:off x="8384599" y="4495111"/>
+            <a:ext cx="1598299" cy="1912888"/>
           </a:xfrm>
           <a:prstGeom prst="roundRect">
             <a:avLst>
@@ -46704,7 +46704,7 @@
         </p:nvSpPr>
         <p:spPr>
           <a:xfrm>
-            <a:off x="8384599" y="3706065"/>
+            <a:off x="8384599" y="4495111"/>
             <a:ext cx="1598299" cy="306000"/>
           </a:xfrm>
           <a:prstGeom prst="roundRect">
@@ -46750,7 +46750,7 @@
               </a:spcAft>
             </a:pPr>
             <a:r>
-              <a:rPr sz="1207" b="1">
+              <a:rPr sz="1350" b="1">
                 <a:solidFill>
                   <a:srgbClr val="FFFFFF"/>
                 </a:solidFill>
@@ -46771,8 +46771,8 @@
         </p:nvSpPr>
         <p:spPr>
           <a:xfrm>
-            <a:off x="8427800" y="4048064"/>
-            <a:ext cx="1511899" cy="444340"/>
+            <a:off x="8427800" y="4837111"/>
+            <a:ext cx="1511899" cy="1552888"/>
           </a:xfrm>
           <a:prstGeom prst="rect">
             <a:avLst/>
@@ -46797,7 +46797,7 @@
               </a:spcAft>
             </a:pPr>
             <a:r>
-              <a:rPr sz="1150" b="0">
+              <a:rPr sz="1300" b="0">
                 <a:solidFill>
                   <a:srgbClr val="1F2A44"/>
                 </a:solidFill>
@@ -46818,7 +46818,7 @@
         </p:nvSpPr>
         <p:spPr>
           <a:xfrm>
-            <a:off x="10011699" y="4000235"/>
+            <a:off x="10011699" y="5343555"/>
             <a:ext cx="140400" cy="216000"/>
           </a:xfrm>
           <a:prstGeom prst="rightArrow">
@@ -46862,8 +46862,8 @@
         </p:nvSpPr>
         <p:spPr>
           <a:xfrm>
-            <a:off x="10180900" y="3706065"/>
-            <a:ext cx="1598299" cy="804340"/>
+            <a:off x="10180900" y="4495111"/>
+            <a:ext cx="1598299" cy="1912888"/>
           </a:xfrm>
           <a:prstGeom prst="roundRect">
             <a:avLst>
@@ -46910,7 +46910,7 @@
         </p:nvSpPr>
         <p:spPr>
           <a:xfrm>
-            <a:off x="10180900" y="3706065"/>
+            <a:off x="10180900" y="4495111"/>
             <a:ext cx="1598299" cy="306000"/>
           </a:xfrm>
           <a:prstGeom prst="roundRect">
@@ -46956,7 +46956,7 @@
               </a:spcAft>
             </a:pPr>
             <a:r>
-              <a:rPr sz="1207" b="1">
+              <a:rPr sz="1350" b="1">
                 <a:solidFill>
                   <a:srgbClr val="FFFFFF"/>
                 </a:solidFill>
@@ -46977,8 +46977,8 @@
         </p:nvSpPr>
         <p:spPr>
           <a:xfrm>
-            <a:off x="10224100" y="4048064"/>
-            <a:ext cx="1511899" cy="444340"/>
+            <a:off x="10224100" y="4837111"/>
+            <a:ext cx="1511899" cy="1552888"/>
           </a:xfrm>
           <a:prstGeom prst="rect">
             <a:avLst/>
@@ -47003,7 +47003,7 @@
               </a:spcAft>
             </a:pPr>
             <a:r>
-              <a:rPr sz="1150" b="0">
+              <a:rPr sz="1300" b="0">
                 <a:solidFill>
                   <a:srgbClr val="1F2A44"/>
                 </a:solidFill>
@@ -47679,7 +47679,7 @@
           <a:lstStyle/>
           <a:p>
             <a:r>
-              <a:rPr sz="1517" b="1">
+              <a:rPr sz="1550" b="1">
                 <a:solidFill>
                   <a:srgbClr val="1F5FD1"/>
                 </a:solidFill>
@@ -47753,7 +47753,7 @@
           <a:noFill/>
         </p:spPr>
         <p:txBody>
-          <a:bodyPr wrap="square" anchor="t" lIns="28800" rIns="28800" tIns="28800" bIns="28800">
+          <a:bodyPr wrap="square" anchor="ctr" lIns="28800" rIns="28800" tIns="28800" bIns="28800">
             <a:noAutofit/>
           </a:bodyPr>
           <a:lstStyle/>
@@ -47766,13 +47766,13 @@
                 <a:spcPts val="0"/>
               </a:spcBef>
               <a:spcAft>
-                <a:spcPts val="1000"/>
+                <a:spcPts val="1212"/>
               </a:spcAft>
               <a:buFont typeface="Segoe UI Symbol"/>
               <a:buChar char="✓"/>
             </a:pPr>
             <a:r>
-              <a:rPr sz="1417" b="0">
+              <a:rPr sz="1450" b="0">
                 <a:solidFill>
                   <a:srgbClr val="1F2A44"/>
                 </a:solidFill>
@@ -47792,13 +47792,13 @@
                 <a:spcPts val="0"/>
               </a:spcBef>
               <a:spcAft>
-                <a:spcPts val="1000"/>
+                <a:spcPts val="1212"/>
               </a:spcAft>
               <a:buFont typeface="Segoe UI Symbol"/>
               <a:buChar char="✓"/>
             </a:pPr>
             <a:r>
-              <a:rPr sz="1417" b="0">
+              <a:rPr sz="1450" b="0">
                 <a:solidFill>
                   <a:srgbClr val="1F2A44"/>
                 </a:solidFill>
@@ -47818,13 +47818,13 @@
                 <a:spcPts val="0"/>
               </a:spcBef>
               <a:spcAft>
-                <a:spcPts val="1000"/>
+                <a:spcPts val="1212"/>
               </a:spcAft>
               <a:buFont typeface="Segoe UI Symbol"/>
               <a:buChar char="✓"/>
             </a:pPr>
             <a:r>
-              <a:rPr sz="1417" b="0">
+              <a:rPr sz="1450" b="0">
                 <a:solidFill>
                   <a:srgbClr val="1F2A44"/>
                 </a:solidFill>
@@ -47908,7 +47908,7 @@
           <a:lstStyle/>
           <a:p>
             <a:r>
-              <a:rPr sz="1517" b="1">
+              <a:rPr sz="1550" b="1">
                 <a:solidFill>
                   <a:srgbClr val="1F5FD1"/>
                 </a:solidFill>
@@ -47982,7 +47982,7 @@
           <a:noFill/>
         </p:spPr>
         <p:txBody>
-          <a:bodyPr wrap="square" anchor="t" lIns="28800" rIns="28800" tIns="28800" bIns="28800">
+          <a:bodyPr wrap="square" anchor="ctr" lIns="28800" rIns="28800" tIns="28800" bIns="28800">
             <a:noAutofit/>
           </a:bodyPr>
           <a:lstStyle/>
@@ -47995,13 +47995,13 @@
                 <a:spcPts val="0"/>
               </a:spcBef>
               <a:spcAft>
-                <a:spcPts val="1000"/>
+                <a:spcPts val="1212"/>
               </a:spcAft>
               <a:buFont typeface="Segoe UI Symbol"/>
               <a:buChar char="✓"/>
             </a:pPr>
             <a:r>
-              <a:rPr sz="1417" b="0">
+              <a:rPr sz="1450" b="0">
                 <a:solidFill>
                   <a:srgbClr val="1F2A44"/>
                 </a:solidFill>
@@ -48021,13 +48021,13 @@
                 <a:spcPts val="0"/>
               </a:spcBef>
               <a:spcAft>
-                <a:spcPts val="1000"/>
+                <a:spcPts val="1212"/>
               </a:spcAft>
               <a:buFont typeface="Segoe UI Symbol"/>
               <a:buChar char="✓"/>
             </a:pPr>
             <a:r>
-              <a:rPr sz="1417" b="0">
+              <a:rPr sz="1450" b="0">
                 <a:solidFill>
                   <a:srgbClr val="1F2A44"/>
                 </a:solidFill>
@@ -48047,13 +48047,13 @@
                 <a:spcPts val="0"/>
               </a:spcBef>
               <a:spcAft>
-                <a:spcPts val="1000"/>
+                <a:spcPts val="1212"/>
               </a:spcAft>
               <a:buFont typeface="Segoe UI Symbol"/>
               <a:buChar char="✓"/>
             </a:pPr>
             <a:r>
-              <a:rPr sz="1417" b="0">
+              <a:rPr sz="1450" b="0">
                 <a:solidFill>
                   <a:srgbClr val="1F2A44"/>
                 </a:solidFill>

--- a/proposals/2026-10_kcg-aiops-relay/발표자료.pptx
+++ b/proposals/2026-10_kcg-aiops-relay/발표자료.pptx
@@ -15211,7 +15211,7 @@
         <p:spPr>
           <a:xfrm>
             <a:off x="324000" y="1998000"/>
-            <a:ext cx="1274400" cy="2090829"/>
+            <a:ext cx="1274400" cy="786803"/>
           </a:xfrm>
           <a:prstGeom prst="roundRect">
             <a:avLst>
@@ -15304,7 +15304,7 @@
               </a:spcAft>
             </a:pPr>
             <a:r>
-              <a:rPr sz="1285" b="1">
+              <a:rPr sz="1150" b="1">
                 <a:solidFill>
                   <a:srgbClr val="FFFFFF"/>
                 </a:solidFill>
@@ -15326,7 +15326,7 @@
         <p:spPr>
           <a:xfrm>
             <a:off x="367200" y="2340000"/>
-            <a:ext cx="1188000" cy="1730829"/>
+            <a:ext cx="1188000" cy="426803"/>
           </a:xfrm>
           <a:prstGeom prst="rect">
             <a:avLst/>
@@ -15351,7 +15351,7 @@
               </a:spcAft>
             </a:pPr>
             <a:r>
-              <a:rPr sz="1420" b="0">
+              <a:rPr sz="1092" b="0">
                 <a:solidFill>
                   <a:srgbClr val="1F2A44"/>
                 </a:solidFill>
@@ -15372,7 +15372,7 @@
         </p:nvSpPr>
         <p:spPr>
           <a:xfrm>
-            <a:off x="1627200" y="2935414"/>
+            <a:off x="1627200" y="2283401"/>
             <a:ext cx="140400" cy="216000"/>
           </a:xfrm>
           <a:prstGeom prst="rightArrow">
@@ -15417,7 +15417,7 @@
         <p:spPr>
           <a:xfrm>
             <a:off x="1796400" y="1998000"/>
-            <a:ext cx="1274400" cy="2090829"/>
+            <a:ext cx="1274400" cy="786803"/>
           </a:xfrm>
           <a:prstGeom prst="roundRect">
             <a:avLst>
@@ -15510,7 +15510,7 @@
               </a:spcAft>
             </a:pPr>
             <a:r>
-              <a:rPr sz="1285" b="1">
+              <a:rPr sz="1150" b="1">
                 <a:solidFill>
                   <a:srgbClr val="FFFFFF"/>
                 </a:solidFill>
@@ -15532,7 +15532,7 @@
         <p:spPr>
           <a:xfrm>
             <a:off x="1839600" y="2340000"/>
-            <a:ext cx="1188000" cy="1730829"/>
+            <a:ext cx="1188000" cy="426803"/>
           </a:xfrm>
           <a:prstGeom prst="rect">
             <a:avLst/>
@@ -15557,7 +15557,7 @@
               </a:spcAft>
             </a:pPr>
             <a:r>
-              <a:rPr sz="1420" b="0">
+              <a:rPr sz="1092" b="0">
                 <a:solidFill>
                   <a:srgbClr val="1F2A44"/>
                 </a:solidFill>
@@ -15578,7 +15578,7 @@
         </p:nvSpPr>
         <p:spPr>
           <a:xfrm>
-            <a:off x="3099600" y="2935414"/>
+            <a:off x="3099600" y="2283401"/>
             <a:ext cx="140400" cy="216000"/>
           </a:xfrm>
           <a:prstGeom prst="rightArrow">
@@ -15623,7 +15623,7 @@
         <p:spPr>
           <a:xfrm>
             <a:off x="3268800" y="1998000"/>
-            <a:ext cx="1274400" cy="2090829"/>
+            <a:ext cx="1274400" cy="786803"/>
           </a:xfrm>
           <a:prstGeom prst="roundRect">
             <a:avLst>
@@ -15716,7 +15716,7 @@
               </a:spcAft>
             </a:pPr>
             <a:r>
-              <a:rPr sz="1285" b="1">
+              <a:rPr sz="1150" b="1">
                 <a:solidFill>
                   <a:srgbClr val="FFFFFF"/>
                 </a:solidFill>
@@ -15738,7 +15738,7 @@
         <p:spPr>
           <a:xfrm>
             <a:off x="3311999" y="2340000"/>
-            <a:ext cx="1188000" cy="1730829"/>
+            <a:ext cx="1188000" cy="426803"/>
           </a:xfrm>
           <a:prstGeom prst="rect">
             <a:avLst/>
@@ -15763,7 +15763,7 @@
               </a:spcAft>
             </a:pPr>
             <a:r>
-              <a:rPr sz="1420" b="0">
+              <a:rPr sz="1092" b="0">
                 <a:solidFill>
                   <a:srgbClr val="1F2A44"/>
                 </a:solidFill>
@@ -15784,7 +15784,7 @@
         </p:nvSpPr>
         <p:spPr>
           <a:xfrm>
-            <a:off x="4572000" y="2935414"/>
+            <a:off x="4572000" y="2283401"/>
             <a:ext cx="140400" cy="216000"/>
           </a:xfrm>
           <a:prstGeom prst="rightArrow">
@@ -15829,7 +15829,7 @@
         <p:spPr>
           <a:xfrm>
             <a:off x="4741200" y="1998000"/>
-            <a:ext cx="1274400" cy="2090829"/>
+            <a:ext cx="1274400" cy="786803"/>
           </a:xfrm>
           <a:prstGeom prst="roundRect">
             <a:avLst>
@@ -15922,7 +15922,7 @@
               </a:spcAft>
             </a:pPr>
             <a:r>
-              <a:rPr sz="1285" b="1">
+              <a:rPr sz="1150" b="1">
                 <a:solidFill>
                   <a:srgbClr val="FFFFFF"/>
                 </a:solidFill>
@@ -15944,7 +15944,7 @@
         <p:spPr>
           <a:xfrm>
             <a:off x="4784400" y="2340000"/>
-            <a:ext cx="1188000" cy="1730829"/>
+            <a:ext cx="1188000" cy="426803"/>
           </a:xfrm>
           <a:prstGeom prst="rect">
             <a:avLst/>
@@ -15969,7 +15969,7 @@
               </a:spcAft>
             </a:pPr>
             <a:r>
-              <a:rPr sz="1420" b="0">
+              <a:rPr sz="1092" b="0">
                 <a:solidFill>
                   <a:srgbClr val="1F2A44"/>
                 </a:solidFill>
@@ -15990,8 +15990,8 @@
         </p:nvSpPr>
         <p:spPr>
           <a:xfrm>
-            <a:off x="324000" y="4196829"/>
-            <a:ext cx="5691600" cy="1779170"/>
+            <a:off x="324000" y="2892803"/>
+            <a:ext cx="5691600" cy="3083196"/>
           </a:xfrm>
           <a:prstGeom prst="rect">
             <a:avLst/>
@@ -16009,7 +16009,7 @@
                 <a:spcPct val="120000"/>
               </a:lnSpc>
               <a:spcBef>
-                <a:spcPts val="2458"/>
+                <a:spcPts val="2700"/>
               </a:spcBef>
               <a:spcAft>
                 <a:spcPts val="0"/>
@@ -16035,7 +16035,7 @@
                 <a:spcPct val="120000"/>
               </a:lnSpc>
               <a:spcBef>
-                <a:spcPts val="2458"/>
+                <a:spcPts val="2700"/>
               </a:spcBef>
               <a:spcAft>
                 <a:spcPts val="0"/>
@@ -16146,7 +16146,7 @@
         <p:spPr>
           <a:xfrm>
             <a:off x="6177600" y="1998000"/>
-            <a:ext cx="1274400" cy="2210914"/>
+            <a:ext cx="1274400" cy="786803"/>
           </a:xfrm>
           <a:prstGeom prst="roundRect">
             <a:avLst>
@@ -16239,7 +16239,7 @@
               </a:spcAft>
             </a:pPr>
             <a:r>
-              <a:rPr sz="1285" b="1">
+              <a:rPr sz="1150" b="1">
                 <a:solidFill>
                   <a:srgbClr val="FFFFFF"/>
                 </a:solidFill>
@@ -16261,7 +16261,7 @@
         <p:spPr>
           <a:xfrm>
             <a:off x="6220800" y="2340000"/>
-            <a:ext cx="1188000" cy="1850914"/>
+            <a:ext cx="1188000" cy="426803"/>
           </a:xfrm>
           <a:prstGeom prst="rect">
             <a:avLst/>
@@ -16286,7 +16286,7 @@
               </a:spcAft>
             </a:pPr>
             <a:r>
-              <a:rPr sz="1420" b="0">
+              <a:rPr sz="1092" b="0">
                 <a:solidFill>
                   <a:srgbClr val="1F2A44"/>
                 </a:solidFill>
@@ -16307,7 +16307,7 @@
         </p:nvSpPr>
         <p:spPr>
           <a:xfrm>
-            <a:off x="7480799" y="2995457"/>
+            <a:off x="7480799" y="2283401"/>
             <a:ext cx="140400" cy="216000"/>
           </a:xfrm>
           <a:prstGeom prst="rightArrow">
@@ -16352,7 +16352,7 @@
         <p:spPr>
           <a:xfrm>
             <a:off x="7650000" y="1998000"/>
-            <a:ext cx="1274400" cy="2210914"/>
+            <a:ext cx="1274400" cy="786803"/>
           </a:xfrm>
           <a:prstGeom prst="roundRect">
             <a:avLst>
@@ -16445,7 +16445,7 @@
               </a:spcAft>
             </a:pPr>
             <a:r>
-              <a:rPr sz="1285" b="1">
+              <a:rPr sz="1150" b="1">
                 <a:solidFill>
                   <a:srgbClr val="FFFFFF"/>
                 </a:solidFill>
@@ -16467,7 +16467,7 @@
         <p:spPr>
           <a:xfrm>
             <a:off x="7693200" y="2340000"/>
-            <a:ext cx="1188000" cy="1850914"/>
+            <a:ext cx="1188000" cy="426803"/>
           </a:xfrm>
           <a:prstGeom prst="rect">
             <a:avLst/>
@@ -16492,7 +16492,7 @@
               </a:spcAft>
             </a:pPr>
             <a:r>
-              <a:rPr sz="1420" b="0">
+              <a:rPr sz="1092" b="0">
                 <a:solidFill>
                   <a:srgbClr val="1F2A44"/>
                 </a:solidFill>
@@ -16513,7 +16513,7 @@
         </p:nvSpPr>
         <p:spPr>
           <a:xfrm>
-            <a:off x="8953200" y="2995457"/>
+            <a:off x="8953200" y="2283401"/>
             <a:ext cx="140400" cy="216000"/>
           </a:xfrm>
           <a:prstGeom prst="rightArrow">
@@ -16558,7 +16558,7 @@
         <p:spPr>
           <a:xfrm>
             <a:off x="9122400" y="1998000"/>
-            <a:ext cx="1274400" cy="2210914"/>
+            <a:ext cx="1274400" cy="786803"/>
           </a:xfrm>
           <a:prstGeom prst="roundRect">
             <a:avLst>
@@ -16651,7 +16651,7 @@
               </a:spcAft>
             </a:pPr>
             <a:r>
-              <a:rPr sz="1285" b="1">
+              <a:rPr sz="1150" b="1">
                 <a:solidFill>
                   <a:srgbClr val="FFFFFF"/>
                 </a:solidFill>
@@ -16673,7 +16673,7 @@
         <p:spPr>
           <a:xfrm>
             <a:off x="9165600" y="2340000"/>
-            <a:ext cx="1188000" cy="1850914"/>
+            <a:ext cx="1188000" cy="426803"/>
           </a:xfrm>
           <a:prstGeom prst="rect">
             <a:avLst/>
@@ -16698,7 +16698,7 @@
               </a:spcAft>
             </a:pPr>
             <a:r>
-              <a:rPr sz="1420" b="0">
+              <a:rPr sz="1092" b="0">
                 <a:solidFill>
                   <a:srgbClr val="1F2A44"/>
                 </a:solidFill>
@@ -16719,7 +16719,7 @@
         </p:nvSpPr>
         <p:spPr>
           <a:xfrm>
-            <a:off x="10425599" y="2995457"/>
+            <a:off x="10425599" y="2283401"/>
             <a:ext cx="140400" cy="216000"/>
           </a:xfrm>
           <a:prstGeom prst="rightArrow">
@@ -16764,7 +16764,7 @@
         <p:spPr>
           <a:xfrm>
             <a:off x="10594800" y="1998000"/>
-            <a:ext cx="1274400" cy="2210914"/>
+            <a:ext cx="1274400" cy="786803"/>
           </a:xfrm>
           <a:prstGeom prst="roundRect">
             <a:avLst>
@@ -16857,7 +16857,7 @@
               </a:spcAft>
             </a:pPr>
             <a:r>
-              <a:rPr sz="1285" b="1">
+              <a:rPr sz="1150" b="1">
                 <a:solidFill>
                   <a:srgbClr val="FFFFFF"/>
                 </a:solidFill>
@@ -16879,7 +16879,7 @@
         <p:spPr>
           <a:xfrm>
             <a:off x="10638000" y="2340000"/>
-            <a:ext cx="1188000" cy="1850914"/>
+            <a:ext cx="1188000" cy="426803"/>
           </a:xfrm>
           <a:prstGeom prst="rect">
             <a:avLst/>
@@ -16904,7 +16904,7 @@
               </a:spcAft>
             </a:pPr>
             <a:r>
-              <a:rPr sz="1420" b="0">
+              <a:rPr sz="1092" b="0">
                 <a:solidFill>
                   <a:srgbClr val="1F2A44"/>
                 </a:solidFill>
@@ -16925,8 +16925,8 @@
         </p:nvSpPr>
         <p:spPr>
           <a:xfrm>
-            <a:off x="6177600" y="4316914"/>
-            <a:ext cx="5691600" cy="1659085"/>
+            <a:off x="6177600" y="2892803"/>
+            <a:ext cx="5691600" cy="3083196"/>
           </a:xfrm>
           <a:prstGeom prst="rect">
             <a:avLst/>
@@ -17860,7 +17860,7 @@
         <p:spPr>
           <a:xfrm>
             <a:off x="324000" y="1998000"/>
-            <a:ext cx="1459995" cy="2462914"/>
+            <a:ext cx="1459995" cy="825940"/>
           </a:xfrm>
           <a:prstGeom prst="roundRect">
             <a:avLst>
@@ -17953,7 +17953,7 @@
               </a:spcAft>
             </a:pPr>
             <a:r>
-              <a:rPr sz="1350" b="1">
+              <a:rPr sz="1207" b="1">
                 <a:solidFill>
                   <a:srgbClr val="FFFFFF"/>
                 </a:solidFill>
@@ -17975,7 +17975,7 @@
         <p:spPr>
           <a:xfrm>
             <a:off x="367200" y="2340000"/>
-            <a:ext cx="1373595" cy="2102914"/>
+            <a:ext cx="1373595" cy="465940"/>
           </a:xfrm>
           <a:prstGeom prst="rect">
             <a:avLst/>
@@ -18002,7 +18002,7 @@
               <a:buChar char="•"/>
             </a:pPr>
             <a:r>
-              <a:rPr sz="1300" b="0">
+              <a:rPr sz="1150" b="0">
                 <a:solidFill>
                   <a:srgbClr val="1F2A44"/>
                 </a:solidFill>
@@ -18028,7 +18028,7 @@
               <a:buChar char="•"/>
             </a:pPr>
             <a:r>
-              <a:rPr sz="1300" b="0">
+              <a:rPr sz="1150" b="0">
                 <a:solidFill>
                   <a:srgbClr val="1F2A44"/>
                 </a:solidFill>
@@ -18049,7 +18049,7 @@
         </p:nvSpPr>
         <p:spPr>
           <a:xfrm>
-            <a:off x="1812795" y="3121457"/>
+            <a:off x="1812795" y="2302970"/>
             <a:ext cx="140400" cy="216000"/>
           </a:xfrm>
           <a:prstGeom prst="rightArrow">
@@ -18094,7 +18094,7 @@
         <p:spPr>
           <a:xfrm>
             <a:off x="1981995" y="1998000"/>
-            <a:ext cx="1459995" cy="2462914"/>
+            <a:ext cx="1459995" cy="825940"/>
           </a:xfrm>
           <a:prstGeom prst="roundRect">
             <a:avLst>
@@ -18187,7 +18187,7 @@
               </a:spcAft>
             </a:pPr>
             <a:r>
-              <a:rPr sz="1350" b="1">
+              <a:rPr sz="1207" b="1">
                 <a:solidFill>
                   <a:srgbClr val="FFFFFF"/>
                 </a:solidFill>
@@ -18209,7 +18209,7 @@
         <p:spPr>
           <a:xfrm>
             <a:off x="2025195" y="2340000"/>
-            <a:ext cx="1373595" cy="2102914"/>
+            <a:ext cx="1373595" cy="465940"/>
           </a:xfrm>
           <a:prstGeom prst="rect">
             <a:avLst/>
@@ -18236,7 +18236,7 @@
               <a:buChar char="•"/>
             </a:pPr>
             <a:r>
-              <a:rPr sz="1300" b="0">
+              <a:rPr sz="1150" b="0">
                 <a:solidFill>
                   <a:srgbClr val="1F2A44"/>
                 </a:solidFill>
@@ -18262,7 +18262,7 @@
               <a:buChar char="•"/>
             </a:pPr>
             <a:r>
-              <a:rPr sz="1300" b="0">
+              <a:rPr sz="1150" b="0">
                 <a:solidFill>
                   <a:srgbClr val="1F2A44"/>
                 </a:solidFill>
@@ -18283,7 +18283,7 @@
         </p:nvSpPr>
         <p:spPr>
           <a:xfrm>
-            <a:off x="3470791" y="3121457"/>
+            <a:off x="3470791" y="2302970"/>
             <a:ext cx="140400" cy="216000"/>
           </a:xfrm>
           <a:prstGeom prst="rightArrow">
@@ -18328,7 +18328,7 @@
         <p:spPr>
           <a:xfrm>
             <a:off x="3639991" y="1998000"/>
-            <a:ext cx="1459995" cy="2462914"/>
+            <a:ext cx="1459995" cy="825940"/>
           </a:xfrm>
           <a:prstGeom prst="roundRect">
             <a:avLst>
@@ -18421,7 +18421,7 @@
               </a:spcAft>
             </a:pPr>
             <a:r>
-              <a:rPr sz="1350" b="1">
+              <a:rPr sz="1207" b="1">
                 <a:solidFill>
                   <a:srgbClr val="FFFFFF"/>
                 </a:solidFill>
@@ -18443,7 +18443,7 @@
         <p:spPr>
           <a:xfrm>
             <a:off x="3683191" y="2340000"/>
-            <a:ext cx="1373595" cy="2102914"/>
+            <a:ext cx="1373595" cy="465940"/>
           </a:xfrm>
           <a:prstGeom prst="rect">
             <a:avLst/>
@@ -18470,7 +18470,7 @@
               <a:buChar char="•"/>
             </a:pPr>
             <a:r>
-              <a:rPr sz="1300" b="0">
+              <a:rPr sz="1150" b="0">
                 <a:solidFill>
                   <a:srgbClr val="1F2A44"/>
                 </a:solidFill>
@@ -18496,7 +18496,7 @@
               <a:buChar char="•"/>
             </a:pPr>
             <a:r>
-              <a:rPr sz="1300" b="0">
+              <a:rPr sz="1150" b="0">
                 <a:solidFill>
                   <a:srgbClr val="1F2A44"/>
                 </a:solidFill>
@@ -18517,7 +18517,7 @@
         </p:nvSpPr>
         <p:spPr>
           <a:xfrm>
-            <a:off x="5128786" y="3121457"/>
+            <a:off x="5128786" y="2302970"/>
             <a:ext cx="140400" cy="216000"/>
           </a:xfrm>
           <a:prstGeom prst="rightArrow">
@@ -18562,7 +18562,7 @@
         <p:spPr>
           <a:xfrm>
             <a:off x="5297986" y="1998000"/>
-            <a:ext cx="1459995" cy="2462914"/>
+            <a:ext cx="1459995" cy="825940"/>
           </a:xfrm>
           <a:prstGeom prst="roundRect">
             <a:avLst>
@@ -18655,7 +18655,7 @@
               </a:spcAft>
             </a:pPr>
             <a:r>
-              <a:rPr sz="1350" b="1">
+              <a:rPr sz="1207" b="1">
                 <a:solidFill>
                   <a:srgbClr val="FFFFFF"/>
                 </a:solidFill>
@@ -18677,7 +18677,7 @@
         <p:spPr>
           <a:xfrm>
             <a:off x="5341186" y="2340000"/>
-            <a:ext cx="1373595" cy="2102914"/>
+            <a:ext cx="1373595" cy="465940"/>
           </a:xfrm>
           <a:prstGeom prst="rect">
             <a:avLst/>
@@ -18704,7 +18704,7 @@
               <a:buChar char="•"/>
             </a:pPr>
             <a:r>
-              <a:rPr sz="1300" b="0">
+              <a:rPr sz="1150" b="0">
                 <a:solidFill>
                   <a:srgbClr val="1F2A44"/>
                 </a:solidFill>
@@ -18730,7 +18730,7 @@
               <a:buChar char="•"/>
             </a:pPr>
             <a:r>
-              <a:rPr sz="1300" b="0">
+              <a:rPr sz="1150" b="0">
                 <a:solidFill>
                   <a:srgbClr val="1F2A44"/>
                 </a:solidFill>
@@ -18751,8 +18751,8 @@
         </p:nvSpPr>
         <p:spPr>
           <a:xfrm>
-            <a:off x="324000" y="4568914"/>
-            <a:ext cx="6433982" cy="1911085"/>
+            <a:off x="324000" y="2931940"/>
+            <a:ext cx="6433982" cy="3548059"/>
           </a:xfrm>
           <a:prstGeom prst="rect">
             <a:avLst/>
@@ -24088,7 +24088,7 @@
                 </a:tc>
               </a:tr>
               <a:tr h="296100">
-                <a:tc rowSpan="3">
+                <a:tc rowSpan="4">
                   <a:txBody>
                     <a:bodyPr wrap="square"/>
                     <a:lstStyle/>
@@ -24919,7 +24919,7 @@
                 </a:tc>
               </a:tr>
               <a:tr h="296100">
-                <a:tc>
+                <a:tc vMerge="1">
                   <a:txBody>
                     <a:bodyPr wrap="square"/>
                     <a:lstStyle/>
@@ -26092,7 +26092,7 @@
         <p:spPr>
           <a:xfrm>
             <a:off x="6177600" y="1998000"/>
-            <a:ext cx="1274400" cy="2069796"/>
+            <a:ext cx="1274400" cy="620201"/>
           </a:xfrm>
           <a:prstGeom prst="roundRect">
             <a:avLst>
@@ -26185,7 +26185,7 @@
               </a:spcAft>
             </a:pPr>
             <a:r>
-              <a:rPr sz="1285" b="1">
+              <a:rPr sz="1150" b="1">
                 <a:solidFill>
                   <a:srgbClr val="FFFFFF"/>
                 </a:solidFill>
@@ -26207,7 +26207,7 @@
         <p:spPr>
           <a:xfrm>
             <a:off x="6220800" y="2340000"/>
-            <a:ext cx="1188000" cy="1709796"/>
+            <a:ext cx="1188000" cy="260201"/>
           </a:xfrm>
           <a:prstGeom prst="rect">
             <a:avLst/>
@@ -26232,7 +26232,7 @@
               </a:spcAft>
             </a:pPr>
             <a:r>
-              <a:rPr sz="1420" b="0">
+              <a:rPr sz="1092" b="0">
                 <a:solidFill>
                   <a:srgbClr val="1F2A44"/>
                 </a:solidFill>
@@ -26253,7 +26253,7 @@
         </p:nvSpPr>
         <p:spPr>
           <a:xfrm>
-            <a:off x="7480799" y="2924898"/>
+            <a:off x="7480799" y="2200100"/>
             <a:ext cx="140400" cy="216000"/>
           </a:xfrm>
           <a:prstGeom prst="rightArrow">
@@ -26298,7 +26298,7 @@
         <p:spPr>
           <a:xfrm>
             <a:off x="7650000" y="1998000"/>
-            <a:ext cx="1274400" cy="2069796"/>
+            <a:ext cx="1274400" cy="620201"/>
           </a:xfrm>
           <a:prstGeom prst="roundRect">
             <a:avLst>
@@ -26391,7 +26391,7 @@
               </a:spcAft>
             </a:pPr>
             <a:r>
-              <a:rPr sz="1285" b="1">
+              <a:rPr sz="1150" b="1">
                 <a:solidFill>
                   <a:srgbClr val="FFFFFF"/>
                 </a:solidFill>
@@ -26413,7 +26413,7 @@
         <p:spPr>
           <a:xfrm>
             <a:off x="7693200" y="2340000"/>
-            <a:ext cx="1188000" cy="1709796"/>
+            <a:ext cx="1188000" cy="260201"/>
           </a:xfrm>
           <a:prstGeom prst="rect">
             <a:avLst/>
@@ -26438,7 +26438,7 @@
               </a:spcAft>
             </a:pPr>
             <a:r>
-              <a:rPr sz="1420" b="0">
+              <a:rPr sz="1092" b="0">
                 <a:solidFill>
                   <a:srgbClr val="1F2A44"/>
                 </a:solidFill>
@@ -26459,7 +26459,7 @@
         </p:nvSpPr>
         <p:spPr>
           <a:xfrm>
-            <a:off x="8953200" y="2924898"/>
+            <a:off x="8953200" y="2200100"/>
             <a:ext cx="140400" cy="216000"/>
           </a:xfrm>
           <a:prstGeom prst="rightArrow">
@@ -26504,7 +26504,7 @@
         <p:spPr>
           <a:xfrm>
             <a:off x="9122400" y="1998000"/>
-            <a:ext cx="1274400" cy="2069796"/>
+            <a:ext cx="1274400" cy="620201"/>
           </a:xfrm>
           <a:prstGeom prst="roundRect">
             <a:avLst>
@@ -26597,7 +26597,7 @@
               </a:spcAft>
             </a:pPr>
             <a:r>
-              <a:rPr sz="1285" b="1">
+              <a:rPr sz="1150" b="1">
                 <a:solidFill>
                   <a:srgbClr val="FFFFFF"/>
                 </a:solidFill>
@@ -26619,7 +26619,7 @@
         <p:spPr>
           <a:xfrm>
             <a:off x="9165600" y="2340000"/>
-            <a:ext cx="1188000" cy="1709796"/>
+            <a:ext cx="1188000" cy="260201"/>
           </a:xfrm>
           <a:prstGeom prst="rect">
             <a:avLst/>
@@ -26644,7 +26644,7 @@
               </a:spcAft>
             </a:pPr>
             <a:r>
-              <a:rPr sz="1420" b="0">
+              <a:rPr sz="1092" b="0">
                 <a:solidFill>
                   <a:srgbClr val="1F2A44"/>
                 </a:solidFill>
@@ -26665,7 +26665,7 @@
         </p:nvSpPr>
         <p:spPr>
           <a:xfrm>
-            <a:off x="10425599" y="2924898"/>
+            <a:off x="10425599" y="2200100"/>
             <a:ext cx="140400" cy="216000"/>
           </a:xfrm>
           <a:prstGeom prst="rightArrow">
@@ -26710,7 +26710,7 @@
         <p:spPr>
           <a:xfrm>
             <a:off x="10594800" y="1998000"/>
-            <a:ext cx="1274400" cy="2069796"/>
+            <a:ext cx="1274400" cy="620201"/>
           </a:xfrm>
           <a:prstGeom prst="roundRect">
             <a:avLst>
@@ -26803,7 +26803,7 @@
               </a:spcAft>
             </a:pPr>
             <a:r>
-              <a:rPr sz="1285" b="1">
+              <a:rPr sz="1150" b="1">
                 <a:solidFill>
                   <a:srgbClr val="FFFFFF"/>
                 </a:solidFill>
@@ -26825,7 +26825,7 @@
         <p:spPr>
           <a:xfrm>
             <a:off x="10638000" y="2340000"/>
-            <a:ext cx="1188000" cy="1709796"/>
+            <a:ext cx="1188000" cy="260201"/>
           </a:xfrm>
           <a:prstGeom prst="rect">
             <a:avLst/>
@@ -26850,7 +26850,7 @@
               </a:spcAft>
             </a:pPr>
             <a:r>
-              <a:rPr sz="1420" b="0">
+              <a:rPr sz="1092" b="0">
                 <a:solidFill>
                   <a:srgbClr val="1F2A44"/>
                 </a:solidFill>
@@ -26872,8 +26872,8 @@
           <p:nvPr/>
         </p:nvGraphicFramePr>
         <p:xfrm>
-          <a:off x="6177600" y="4175796"/>
-          <a:ext cx="5691599" cy="2304200"/>
+          <a:off x="6177600" y="2726201"/>
+          <a:ext cx="5691599" cy="3753796"/>
         </p:xfrm>
         <a:graphic>
           <a:graphicData uri="http://schemas.openxmlformats.org/drawingml/2006/table">
@@ -26883,7 +26883,7 @@
                 <a:gridCol w="3478200"/>
                 <a:gridCol w="2213399"/>
               </a:tblGrid>
-              <a:tr h="576050">
+              <a:tr h="938449">
                 <a:tc>
                   <a:txBody>
                     <a:bodyPr wrap="square"/>
@@ -26995,7 +26995,7 @@
                   </a:tcPr>
                 </a:tc>
               </a:tr>
-              <a:tr h="576050">
+              <a:tr h="938449">
                 <a:tc>
                   <a:txBody>
                     <a:bodyPr wrap="square"/>
@@ -27107,7 +27107,7 @@
                   </a:tcPr>
                 </a:tc>
               </a:tr>
-              <a:tr h="576050">
+              <a:tr h="938449">
                 <a:tc>
                   <a:txBody>
                     <a:bodyPr wrap="square"/>
@@ -27219,7 +27219,7 @@
                   </a:tcPr>
                 </a:tc>
               </a:tr>
-              <a:tr h="576050">
+              <a:tr h="938449">
                 <a:tc>
                   <a:txBody>
                     <a:bodyPr wrap="square"/>
@@ -44557,7 +44557,7 @@
         </p:nvGraphicFramePr>
         <p:xfrm>
           <a:off x="4792000" y="1638000"/>
-          <a:ext cx="6987196" cy="2749110"/>
+          <a:ext cx="6987196" cy="3797994"/>
         </p:xfrm>
         <a:graphic>
           <a:graphicData uri="http://schemas.openxmlformats.org/drawingml/2006/table">
@@ -44570,7 +44570,7 @@
                 <a:gridCol w="1164533"/>
                 <a:gridCol w="931626"/>
               </a:tblGrid>
-              <a:tr h="458185">
+              <a:tr h="632999">
                 <a:tc>
                   <a:txBody>
                     <a:bodyPr wrap="square"/>
@@ -44847,7 +44847,7 @@
                   </a:tcPr>
                 </a:tc>
               </a:tr>
-              <a:tr h="458185">
+              <a:tr h="632999">
                 <a:tc>
                   <a:txBody>
                     <a:bodyPr wrap="square"/>
@@ -45124,7 +45124,7 @@
                   </a:tcPr>
                 </a:tc>
               </a:tr>
-              <a:tr h="458185">
+              <a:tr h="632999">
                 <a:tc>
                   <a:txBody>
                     <a:bodyPr wrap="square"/>
@@ -45401,7 +45401,7 @@
                   </a:tcPr>
                 </a:tc>
               </a:tr>
-              <a:tr h="458185">
+              <a:tr h="632999">
                 <a:tc>
                   <a:txBody>
                     <a:bodyPr wrap="square"/>
@@ -45678,7 +45678,7 @@
                   </a:tcPr>
                 </a:tc>
               </a:tr>
-              <a:tr h="458185">
+              <a:tr h="632999">
                 <a:tc>
                   <a:txBody>
                     <a:bodyPr wrap="square"/>
@@ -45955,7 +45955,7 @@
                   </a:tcPr>
                 </a:tc>
               </a:tr>
-              <a:tr h="458185">
+              <a:tr h="632999">
                 <a:tc>
                   <a:txBody>
                     <a:bodyPr wrap="square"/>
@@ -46244,8 +46244,8 @@
         </p:nvSpPr>
         <p:spPr>
           <a:xfrm>
-            <a:off x="4792000" y="4495111"/>
-            <a:ext cx="1598299" cy="1912888"/>
+            <a:off x="4792000" y="5543999"/>
+            <a:ext cx="1598299" cy="804340"/>
           </a:xfrm>
           <a:prstGeom prst="roundRect">
             <a:avLst>
@@ -46292,7 +46292,7 @@
         </p:nvSpPr>
         <p:spPr>
           <a:xfrm>
-            <a:off x="4792000" y="4495111"/>
+            <a:off x="4792000" y="5543999"/>
             <a:ext cx="1598299" cy="306000"/>
           </a:xfrm>
           <a:prstGeom prst="roundRect">
@@ -46338,7 +46338,7 @@
               </a:spcAft>
             </a:pPr>
             <a:r>
-              <a:rPr sz="1350" b="1">
+              <a:rPr sz="1207" b="1">
                 <a:solidFill>
                   <a:srgbClr val="FFFFFF"/>
                 </a:solidFill>
@@ -46359,8 +46359,8 @@
         </p:nvSpPr>
         <p:spPr>
           <a:xfrm>
-            <a:off x="4835199" y="4837111"/>
-            <a:ext cx="1511899" cy="1552888"/>
+            <a:off x="4835199" y="5885999"/>
+            <a:ext cx="1511899" cy="444340"/>
           </a:xfrm>
           <a:prstGeom prst="rect">
             <a:avLst/>
@@ -46385,7 +46385,7 @@
               </a:spcAft>
             </a:pPr>
             <a:r>
-              <a:rPr sz="1300" b="0">
+              <a:rPr sz="1150" b="0">
                 <a:solidFill>
                   <a:srgbClr val="1F2A44"/>
                 </a:solidFill>
@@ -46406,7 +46406,7 @@
         </p:nvSpPr>
         <p:spPr>
           <a:xfrm>
-            <a:off x="6419099" y="5343555"/>
+            <a:off x="6419099" y="5838170"/>
             <a:ext cx="140400" cy="216000"/>
           </a:xfrm>
           <a:prstGeom prst="rightArrow">
@@ -46450,8 +46450,8 @@
         </p:nvSpPr>
         <p:spPr>
           <a:xfrm>
-            <a:off x="6588299" y="4495111"/>
-            <a:ext cx="1598299" cy="1912888"/>
+            <a:off x="6588299" y="5543999"/>
+            <a:ext cx="1598299" cy="804340"/>
           </a:xfrm>
           <a:prstGeom prst="roundRect">
             <a:avLst>
@@ -46498,7 +46498,7 @@
         </p:nvSpPr>
         <p:spPr>
           <a:xfrm>
-            <a:off x="6588299" y="4495111"/>
+            <a:off x="6588299" y="5543999"/>
             <a:ext cx="1598299" cy="306000"/>
           </a:xfrm>
           <a:prstGeom prst="roundRect">
@@ -46544,7 +46544,7 @@
               </a:spcAft>
             </a:pPr>
             <a:r>
-              <a:rPr sz="1350" b="1">
+              <a:rPr sz="1207" b="1">
                 <a:solidFill>
                   <a:srgbClr val="FFFFFF"/>
                 </a:solidFill>
@@ -46565,8 +46565,8 @@
         </p:nvSpPr>
         <p:spPr>
           <a:xfrm>
-            <a:off x="6631499" y="4837111"/>
-            <a:ext cx="1511899" cy="1552888"/>
+            <a:off x="6631499" y="5885999"/>
+            <a:ext cx="1511899" cy="444340"/>
           </a:xfrm>
           <a:prstGeom prst="rect">
             <a:avLst/>
@@ -46591,7 +46591,7 @@
               </a:spcAft>
             </a:pPr>
             <a:r>
-              <a:rPr sz="1300" b="0">
+              <a:rPr sz="1150" b="0">
                 <a:solidFill>
                   <a:srgbClr val="1F2A44"/>
                 </a:solidFill>
@@ -46612,7 +46612,7 @@
         </p:nvSpPr>
         <p:spPr>
           <a:xfrm>
-            <a:off x="8215399" y="5343555"/>
+            <a:off x="8215399" y="5838170"/>
             <a:ext cx="140400" cy="216000"/>
           </a:xfrm>
           <a:prstGeom prst="rightArrow">
@@ -46656,8 +46656,8 @@
         </p:nvSpPr>
         <p:spPr>
           <a:xfrm>
-            <a:off x="8384599" y="4495111"/>
-            <a:ext cx="1598299" cy="1912888"/>
+            <a:off x="8384599" y="5543999"/>
+            <a:ext cx="1598299" cy="804340"/>
           </a:xfrm>
           <a:prstGeom prst="roundRect">
             <a:avLst>
@@ -46704,7 +46704,7 @@
         </p:nvSpPr>
         <p:spPr>
           <a:xfrm>
-            <a:off x="8384599" y="4495111"/>
+            <a:off x="8384599" y="5543999"/>
             <a:ext cx="1598299" cy="306000"/>
           </a:xfrm>
           <a:prstGeom prst="roundRect">
@@ -46750,7 +46750,7 @@
               </a:spcAft>
             </a:pPr>
             <a:r>
-              <a:rPr sz="1350" b="1">
+              <a:rPr sz="1207" b="1">
                 <a:solidFill>
                   <a:srgbClr val="FFFFFF"/>
                 </a:solidFill>
@@ -46771,8 +46771,8 @@
         </p:nvSpPr>
         <p:spPr>
           <a:xfrm>
-            <a:off x="8427800" y="4837111"/>
-            <a:ext cx="1511899" cy="1552888"/>
+            <a:off x="8427800" y="5885999"/>
+            <a:ext cx="1511899" cy="444340"/>
           </a:xfrm>
           <a:prstGeom prst="rect">
             <a:avLst/>
@@ -46797,7 +46797,7 @@
               </a:spcAft>
             </a:pPr>
             <a:r>
-              <a:rPr sz="1300" b="0">
+              <a:rPr sz="1150" b="0">
                 <a:solidFill>
                   <a:srgbClr val="1F2A44"/>
                 </a:solidFill>
@@ -46818,7 +46818,7 @@
         </p:nvSpPr>
         <p:spPr>
           <a:xfrm>
-            <a:off x="10011699" y="5343555"/>
+            <a:off x="10011699" y="5838170"/>
             <a:ext cx="140400" cy="216000"/>
           </a:xfrm>
           <a:prstGeom prst="rightArrow">
@@ -46862,8 +46862,8 @@
         </p:nvSpPr>
         <p:spPr>
           <a:xfrm>
-            <a:off x="10180900" y="4495111"/>
-            <a:ext cx="1598299" cy="1912888"/>
+            <a:off x="10180900" y="5543999"/>
+            <a:ext cx="1598299" cy="804340"/>
           </a:xfrm>
           <a:prstGeom prst="roundRect">
             <a:avLst>
@@ -46910,7 +46910,7 @@
         </p:nvSpPr>
         <p:spPr>
           <a:xfrm>
-            <a:off x="10180900" y="4495111"/>
+            <a:off x="10180900" y="5543999"/>
             <a:ext cx="1598299" cy="306000"/>
           </a:xfrm>
           <a:prstGeom prst="roundRect">
@@ -46956,7 +46956,7 @@
               </a:spcAft>
             </a:pPr>
             <a:r>
-              <a:rPr sz="1350" b="1">
+              <a:rPr sz="1207" b="1">
                 <a:solidFill>
                   <a:srgbClr val="FFFFFF"/>
                 </a:solidFill>
@@ -46977,8 +46977,8 @@
         </p:nvSpPr>
         <p:spPr>
           <a:xfrm>
-            <a:off x="10224100" y="4837111"/>
-            <a:ext cx="1511899" cy="1552888"/>
+            <a:off x="10224100" y="5885999"/>
+            <a:ext cx="1511899" cy="444340"/>
           </a:xfrm>
           <a:prstGeom prst="rect">
             <a:avLst/>
@@ -47003,7 +47003,7 @@
               </a:spcAft>
             </a:pPr>
             <a:r>
-              <a:rPr sz="1300" b="0">
+              <a:rPr sz="1150" b="0">
                 <a:solidFill>
                   <a:srgbClr val="1F2A44"/>
                 </a:solidFill>
